--- a/slides/output/如何应对职场带节奏-v5-clean.pptx
+++ b/slides/output/如何应对职场带节奏-v5-clean.pptx
@@ -1437,24 +1437,24 @@
         </p:nvSpPr>
         <p:spPr>
           <a:xfrm>
-            <a:off x="457200" y="1097280"/>
-            <a:ext cx="8229600" cy="914400"/>
-          </a:xfrm>
-          <a:prstGeom prst="rect">
-            <a:avLst/>
-          </a:prstGeom>
-          <a:noFill/>
-          <a:ln/>
-        </p:spPr>
-        <p:txBody>
-          <a:bodyPr wrap="square" rtlCol="0" anchor="ctr"/>
-          <a:lstStyle/>
-          <a:p>
-            <a:pPr algn="l" indent="0" marL="0">
-              <a:buNone/>
-            </a:pPr>
-            <a:r>
-              <a:rPr lang="en-US" sz="4000" b="1" dirty="0">
+            <a:off x="457200" y="1188720"/>
+            <a:ext cx="8229600" cy="822960"/>
+          </a:xfrm>
+          <a:prstGeom prst="rect">
+            <a:avLst/>
+          </a:prstGeom>
+          <a:noFill/>
+          <a:ln/>
+        </p:spPr>
+        <p:txBody>
+          <a:bodyPr wrap="square" rtlCol="0" anchor="ctr"/>
+          <a:lstStyle/>
+          <a:p>
+            <a:pPr algn="l" indent="0" marL="0">
+              <a:buNone/>
+            </a:pPr>
+            <a:r>
+              <a:rPr lang="en-US" sz="3600" b="1" dirty="0">
                 <a:solidFill>
                   <a:srgbClr val="000000"/>
                 </a:solidFill>
@@ -1464,7 +1464,7 @@
               </a:rPr>
               <a:t>如何应对职场"带节奏"</a:t>
             </a:r>
-            <a:endParaRPr lang="en-US" sz="4000" dirty="0"/>
+            <a:endParaRPr lang="en-US" sz="3600" dirty="0"/>
           </a:p>
         </p:txBody>
       </p:sp>
@@ -1476,24 +1476,24 @@
         </p:nvSpPr>
         <p:spPr>
           <a:xfrm>
-            <a:off x="457200" y="2194560"/>
-            <a:ext cx="8229600" cy="457200"/>
-          </a:xfrm>
-          <a:prstGeom prst="rect">
-            <a:avLst/>
-          </a:prstGeom>
-          <a:noFill/>
-          <a:ln/>
-        </p:spPr>
-        <p:txBody>
-          <a:bodyPr wrap="square" rtlCol="0" anchor="ctr"/>
-          <a:lstStyle/>
-          <a:p>
-            <a:pPr algn="l" indent="0" marL="0">
-              <a:buNone/>
-            </a:pPr>
-            <a:r>
-              <a:rPr lang="en-US" sz="1600" dirty="0">
+            <a:off x="457200" y="2103120"/>
+            <a:ext cx="8229600" cy="365760"/>
+          </a:xfrm>
+          <a:prstGeom prst="rect">
+            <a:avLst/>
+          </a:prstGeom>
+          <a:noFill/>
+          <a:ln/>
+        </p:spPr>
+        <p:txBody>
+          <a:bodyPr wrap="square" rtlCol="0" anchor="ctr"/>
+          <a:lstStyle/>
+          <a:p>
+            <a:pPr algn="l" indent="0" marL="0">
+              <a:buNone/>
+            </a:pPr>
+            <a:r>
+              <a:rPr lang="en-US" sz="1400" dirty="0">
                 <a:solidFill>
                   <a:srgbClr val="666666"/>
                 </a:solidFill>
@@ -1503,7 +1503,7 @@
               </a:rPr>
               <a:t>刘乾坤开门红激励预警事件深度分析</a:t>
             </a:r>
-            <a:endParaRPr lang="en-US" sz="1600" dirty="0"/>
+            <a:endParaRPr lang="en-US" sz="1400" dirty="0"/>
           </a:p>
         </p:txBody>
       </p:sp>
@@ -1515,8 +1515,8 @@
         </p:nvSpPr>
         <p:spPr>
           <a:xfrm>
-            <a:off x="457200" y="3200400"/>
-            <a:ext cx="731520" cy="256032"/>
+            <a:off x="457200" y="2743200"/>
+            <a:ext cx="640080" cy="219456"/>
           </a:xfrm>
           <a:prstGeom prst="rect">
             <a:avLst/>
@@ -1535,8 +1535,8 @@
         </p:nvSpPr>
         <p:spPr>
           <a:xfrm>
-            <a:off x="457200" y="3200400"/>
-            <a:ext cx="731520" cy="256032"/>
+            <a:off x="457200" y="2743200"/>
+            <a:ext cx="640080" cy="219456"/>
           </a:xfrm>
           <a:prstGeom prst="rect">
             <a:avLst/>
@@ -1552,7 +1552,7 @@
               <a:buNone/>
             </a:pPr>
             <a:r>
-              <a:rPr lang="en-US" sz="1100" b="1" dirty="0">
+              <a:rPr lang="en-US" sz="1000" b="1" dirty="0">
                 <a:solidFill>
                   <a:srgbClr val="FFFFFF"/>
                 </a:solidFill>
@@ -1562,7 +1562,7 @@
               </a:rPr>
               <a:t>v4.0</a:t>
             </a:r>
-            <a:endParaRPr lang="en-US" sz="1100" dirty="0"/>
+            <a:endParaRPr lang="en-US" sz="1000" dirty="0"/>
           </a:p>
         </p:txBody>
       </p:sp>
@@ -1574,7 +1574,7 @@
         </p:nvSpPr>
         <p:spPr>
           <a:xfrm>
-            <a:off x="457200" y="4937760"/>
+            <a:off x="457200" y="4846320"/>
             <a:ext cx="8229600" cy="18288"/>
           </a:xfrm>
           <a:prstGeom prst="rect">
@@ -1724,7 +1724,7 @@
         </p:nvSpPr>
         <p:spPr>
           <a:xfrm>
-            <a:off x="457200" y="1645920"/>
+            <a:off x="457200" y="1554480"/>
             <a:ext cx="457200" cy="320040"/>
           </a:xfrm>
           <a:prstGeom prst="rect">
@@ -1763,7 +1763,7 @@
         </p:nvSpPr>
         <p:spPr>
           <a:xfrm>
-            <a:off x="1097280" y="1645920"/>
+            <a:off x="1097280" y="1554480"/>
             <a:ext cx="6858000" cy="320040"/>
           </a:xfrm>
           <a:prstGeom prst="rect">
@@ -1802,7 +1802,7 @@
         </p:nvSpPr>
         <p:spPr>
           <a:xfrm>
-            <a:off x="1097280" y="1965960"/>
+            <a:off x="1097280" y="1874520"/>
             <a:ext cx="6858000" cy="274320"/>
           </a:xfrm>
           <a:prstGeom prst="rect">
@@ -1841,7 +1841,7 @@
         </p:nvSpPr>
         <p:spPr>
           <a:xfrm>
-            <a:off x="457200" y="2423160"/>
+            <a:off x="457200" y="2331720"/>
             <a:ext cx="8229600" cy="18288"/>
           </a:xfrm>
           <a:prstGeom prst="rect">
@@ -1861,7 +1861,7 @@
         </p:nvSpPr>
         <p:spPr>
           <a:xfrm>
-            <a:off x="457200" y="2514600"/>
+            <a:off x="457200" y="2331720"/>
             <a:ext cx="457200" cy="320040"/>
           </a:xfrm>
           <a:prstGeom prst="rect">
@@ -1900,7 +1900,7 @@
         </p:nvSpPr>
         <p:spPr>
           <a:xfrm>
-            <a:off x="1097280" y="2514600"/>
+            <a:off x="1097280" y="2331720"/>
             <a:ext cx="6858000" cy="320040"/>
           </a:xfrm>
           <a:prstGeom prst="rect">
@@ -1939,7 +1939,7 @@
         </p:nvSpPr>
         <p:spPr>
           <a:xfrm>
-            <a:off x="1097280" y="2834640"/>
+            <a:off x="1097280" y="2651760"/>
             <a:ext cx="6858000" cy="274320"/>
           </a:xfrm>
           <a:prstGeom prst="rect">
@@ -1978,7 +1978,7 @@
         </p:nvSpPr>
         <p:spPr>
           <a:xfrm>
-            <a:off x="457200" y="3291840"/>
+            <a:off x="457200" y="3108960"/>
             <a:ext cx="8229600" cy="18288"/>
           </a:xfrm>
           <a:prstGeom prst="rect">
@@ -1998,7 +1998,7 @@
         </p:nvSpPr>
         <p:spPr>
           <a:xfrm>
-            <a:off x="457200" y="3383280"/>
+            <a:off x="457200" y="3108960"/>
             <a:ext cx="457200" cy="320040"/>
           </a:xfrm>
           <a:prstGeom prst="rect">
@@ -2037,7 +2037,7 @@
         </p:nvSpPr>
         <p:spPr>
           <a:xfrm>
-            <a:off x="1097280" y="3383280"/>
+            <a:off x="1097280" y="3108960"/>
             <a:ext cx="6858000" cy="320040"/>
           </a:xfrm>
           <a:prstGeom prst="rect">
@@ -2076,7 +2076,7 @@
         </p:nvSpPr>
         <p:spPr>
           <a:xfrm>
-            <a:off x="1097280" y="3703320"/>
+            <a:off x="1097280" y="3429000"/>
             <a:ext cx="6858000" cy="274320"/>
           </a:xfrm>
           <a:prstGeom prst="rect">
@@ -2115,7 +2115,7 @@
         </p:nvSpPr>
         <p:spPr>
           <a:xfrm>
-            <a:off x="457200" y="4160520"/>
+            <a:off x="457200" y="3886200"/>
             <a:ext cx="8229600" cy="18288"/>
           </a:xfrm>
           <a:prstGeom prst="rect">
@@ -2135,7 +2135,7 @@
         </p:nvSpPr>
         <p:spPr>
           <a:xfrm>
-            <a:off x="457200" y="4251960"/>
+            <a:off x="457200" y="3886200"/>
             <a:ext cx="457200" cy="320040"/>
           </a:xfrm>
           <a:prstGeom prst="rect">
@@ -2174,7 +2174,7 @@
         </p:nvSpPr>
         <p:spPr>
           <a:xfrm>
-            <a:off x="1097280" y="4251960"/>
+            <a:off x="1097280" y="3886200"/>
             <a:ext cx="6858000" cy="320040"/>
           </a:xfrm>
           <a:prstGeom prst="rect">
@@ -2213,7 +2213,7 @@
         </p:nvSpPr>
         <p:spPr>
           <a:xfrm>
-            <a:off x="1097280" y="4572000"/>
+            <a:off x="1097280" y="4206240"/>
             <a:ext cx="6858000" cy="274320"/>
           </a:xfrm>
           <a:prstGeom prst="rect">
@@ -2382,8 +2382,8 @@
         </p:nvSpPr>
         <p:spPr>
           <a:xfrm>
-            <a:off x="457200" y="1371600"/>
-            <a:ext cx="4023360" cy="320040"/>
+            <a:off x="457200" y="1280160"/>
+            <a:ext cx="4023360" cy="274320"/>
           </a:xfrm>
           <a:prstGeom prst="rect">
             <a:avLst/>
@@ -2402,8 +2402,8 @@
         </p:nvSpPr>
         <p:spPr>
           <a:xfrm>
-            <a:off x="457200" y="1371600"/>
-            <a:ext cx="4023360" cy="320040"/>
+            <a:off x="457200" y="1280160"/>
+            <a:ext cx="4023360" cy="274320"/>
           </a:xfrm>
           <a:prstGeom prst="rect">
             <a:avLst/>
@@ -2419,7 +2419,7 @@
               <a:buNone/>
             </a:pPr>
             <a:r>
-              <a:rPr lang="en-US" sz="1200" b="1" dirty="0">
+              <a:rPr lang="en-US" sz="1100" b="1" dirty="0">
                 <a:solidFill>
                   <a:srgbClr val="FFFFFF"/>
                 </a:solidFill>
@@ -2429,7 +2429,7 @@
               </a:rPr>
               <a:t>刘乾坤的攻击</a:t>
             </a:r>
-            <a:endParaRPr lang="en-US" sz="1200" dirty="0"/>
+            <a:endParaRPr lang="en-US" sz="1100" dirty="0"/>
           </a:p>
         </p:txBody>
       </p:sp>
@@ -2441,8 +2441,8 @@
         </p:nvSpPr>
         <p:spPr>
           <a:xfrm>
-            <a:off x="4663440" y="1371600"/>
-            <a:ext cx="4023360" cy="320040"/>
+            <a:off x="4663440" y="1280160"/>
+            <a:ext cx="4023360" cy="274320"/>
           </a:xfrm>
           <a:prstGeom prst="rect">
             <a:avLst/>
@@ -2461,8 +2461,8 @@
         </p:nvSpPr>
         <p:spPr>
           <a:xfrm>
-            <a:off x="4663440" y="1371600"/>
-            <a:ext cx="4023360" cy="320040"/>
+            <a:off x="4663440" y="1280160"/>
+            <a:ext cx="4023360" cy="274320"/>
           </a:xfrm>
           <a:prstGeom prst="rect">
             <a:avLst/>
@@ -2478,7 +2478,7 @@
               <a:buNone/>
             </a:pPr>
             <a:r>
-              <a:rPr lang="en-US" sz="1200" b="1" dirty="0">
+              <a:rPr lang="en-US" sz="1100" b="1" dirty="0">
                 <a:solidFill>
                   <a:srgbClr val="FFFFFF"/>
                 </a:solidFill>
@@ -2488,7 +2488,7 @@
               </a:rPr>
               <a:t>实际情况</a:t>
             </a:r>
-            <a:endParaRPr lang="en-US" sz="1200" dirty="0"/>
+            <a:endParaRPr lang="en-US" sz="1100" dirty="0"/>
           </a:p>
         </p:txBody>
       </p:sp>
@@ -2500,8 +2500,8 @@
         </p:nvSpPr>
         <p:spPr>
           <a:xfrm>
-            <a:off x="457200" y="1737360"/>
-            <a:ext cx="4023360" cy="548640"/>
+            <a:off x="457200" y="1600200"/>
+            <a:ext cx="4023360" cy="457200"/>
           </a:xfrm>
           <a:prstGeom prst="rect">
             <a:avLst/>
@@ -2520,24 +2520,24 @@
         </p:nvSpPr>
         <p:spPr>
           <a:xfrm>
-            <a:off x="594360" y="1737360"/>
-            <a:ext cx="3749040" cy="548640"/>
-          </a:xfrm>
-          <a:prstGeom prst="rect">
-            <a:avLst/>
-          </a:prstGeom>
-          <a:noFill/>
-          <a:ln/>
-        </p:spPr>
-        <p:txBody>
-          <a:bodyPr wrap="square" rtlCol="0" anchor="ctr"/>
-          <a:lstStyle/>
-          <a:p>
-            <a:pPr algn="l" indent="0" marL="0">
-              <a:buNone/>
-            </a:pPr>
-            <a:r>
-              <a:rPr lang="en-US" sz="1100" dirty="0">
+            <a:off x="594360" y="1600200"/>
+            <a:ext cx="3749040" cy="457200"/>
+          </a:xfrm>
+          <a:prstGeom prst="rect">
+            <a:avLst/>
+          </a:prstGeom>
+          <a:noFill/>
+          <a:ln/>
+        </p:spPr>
+        <p:txBody>
+          <a:bodyPr wrap="square" rtlCol="0" anchor="ctr"/>
+          <a:lstStyle/>
+          <a:p>
+            <a:pPr algn="l" indent="0" marL="0">
+              <a:buNone/>
+            </a:pPr>
+            <a:r>
+              <a:rPr lang="en-US" sz="1000" dirty="0">
                 <a:solidFill>
                   <a:srgbClr val="000000"/>
                 </a:solidFill>
@@ -2547,7 +2547,7 @@
               </a:rPr>
               <a:t>✗ 激励拿不到，供应商会大量流失</a:t>
             </a:r>
-            <a:endParaRPr lang="en-US" sz="1100" dirty="0"/>
+            <a:endParaRPr lang="en-US" sz="1000" dirty="0"/>
           </a:p>
         </p:txBody>
       </p:sp>
@@ -2559,8 +2559,8 @@
         </p:nvSpPr>
         <p:spPr>
           <a:xfrm>
-            <a:off x="457200" y="2331720"/>
-            <a:ext cx="4023360" cy="548640"/>
+            <a:off x="457200" y="2103120"/>
+            <a:ext cx="4023360" cy="457200"/>
           </a:xfrm>
           <a:prstGeom prst="rect">
             <a:avLst/>
@@ -2579,24 +2579,24 @@
         </p:nvSpPr>
         <p:spPr>
           <a:xfrm>
-            <a:off x="594360" y="2331720"/>
-            <a:ext cx="3749040" cy="548640"/>
-          </a:xfrm>
-          <a:prstGeom prst="rect">
-            <a:avLst/>
-          </a:prstGeom>
-          <a:noFill/>
-          <a:ln/>
-        </p:spPr>
-        <p:txBody>
-          <a:bodyPr wrap="square" rtlCol="0" anchor="ctr"/>
-          <a:lstStyle/>
-          <a:p>
-            <a:pPr algn="l" indent="0" marL="0">
-              <a:buNone/>
-            </a:pPr>
-            <a:r>
-              <a:rPr lang="en-US" sz="1100" dirty="0">
+            <a:off x="594360" y="2103120"/>
+            <a:ext cx="3749040" cy="457200"/>
+          </a:xfrm>
+          <a:prstGeom prst="rect">
+            <a:avLst/>
+          </a:prstGeom>
+          <a:noFill/>
+          <a:ln/>
+        </p:spPr>
+        <p:txBody>
+          <a:bodyPr wrap="square" rtlCol="0" anchor="ctr"/>
+          <a:lstStyle/>
+          <a:p>
+            <a:pPr algn="l" indent="0" marL="0">
+              <a:buNone/>
+            </a:pPr>
+            <a:r>
+              <a:rPr lang="en-US" sz="1000" dirty="0">
                 <a:solidFill>
                   <a:srgbClr val="000000"/>
                 </a:solidFill>
@@ -2606,7 +2606,7 @@
               </a:rPr>
               <a:t>✗ 影响 1400 个工人、5000 个家庭</a:t>
             </a:r>
-            <a:endParaRPr lang="en-US" sz="1100" dirty="0"/>
+            <a:endParaRPr lang="en-US" sz="1000" dirty="0"/>
           </a:p>
         </p:txBody>
       </p:sp>
@@ -2618,8 +2618,8 @@
         </p:nvSpPr>
         <p:spPr>
           <a:xfrm>
-            <a:off x="457200" y="2926080"/>
-            <a:ext cx="4023360" cy="548640"/>
+            <a:off x="457200" y="2606040"/>
+            <a:ext cx="4023360" cy="457200"/>
           </a:xfrm>
           <a:prstGeom prst="rect">
             <a:avLst/>
@@ -2638,24 +2638,24 @@
         </p:nvSpPr>
         <p:spPr>
           <a:xfrm>
-            <a:off x="594360" y="2926080"/>
-            <a:ext cx="3749040" cy="548640"/>
-          </a:xfrm>
-          <a:prstGeom prst="rect">
-            <a:avLst/>
-          </a:prstGeom>
-          <a:noFill/>
-          <a:ln/>
-        </p:spPr>
-        <p:txBody>
-          <a:bodyPr wrap="square" rtlCol="0" anchor="ctr"/>
-          <a:lstStyle/>
-          <a:p>
-            <a:pPr algn="l" indent="0" marL="0">
-              <a:buNone/>
-            </a:pPr>
-            <a:r>
-              <a:rPr lang="en-US" sz="1100" dirty="0">
+            <a:off x="594360" y="2606040"/>
+            <a:ext cx="3749040" cy="457200"/>
+          </a:xfrm>
+          <a:prstGeom prst="rect">
+            <a:avLst/>
+          </a:prstGeom>
+          <a:noFill/>
+          <a:ln/>
+        </p:spPr>
+        <p:txBody>
+          <a:bodyPr wrap="square" rtlCol="0" anchor="ctr"/>
+          <a:lstStyle/>
+          <a:p>
+            <a:pPr algn="l" indent="0" marL="0">
+              <a:buNone/>
+            </a:pPr>
+            <a:r>
+              <a:rPr lang="en-US" sz="1000" dirty="0">
                 <a:solidFill>
                   <a:srgbClr val="000000"/>
                 </a:solidFill>
@@ -2665,7 +2665,7 @@
               </a:rPr>
               <a:t>✗ 激励方案定得非常有问题</a:t>
             </a:r>
-            <a:endParaRPr lang="en-US" sz="1100" dirty="0"/>
+            <a:endParaRPr lang="en-US" sz="1000" dirty="0"/>
           </a:p>
         </p:txBody>
       </p:sp>
@@ -2677,8 +2677,8 @@
         </p:nvSpPr>
         <p:spPr>
           <a:xfrm>
-            <a:off x="457200" y="3520440"/>
-            <a:ext cx="4023360" cy="548640"/>
+            <a:off x="457200" y="3108960"/>
+            <a:ext cx="4023360" cy="457200"/>
           </a:xfrm>
           <a:prstGeom prst="rect">
             <a:avLst/>
@@ -2697,24 +2697,24 @@
         </p:nvSpPr>
         <p:spPr>
           <a:xfrm>
-            <a:off x="594360" y="3520440"/>
-            <a:ext cx="3749040" cy="548640"/>
-          </a:xfrm>
-          <a:prstGeom prst="rect">
-            <a:avLst/>
-          </a:prstGeom>
-          <a:noFill/>
-          <a:ln/>
-        </p:spPr>
-        <p:txBody>
-          <a:bodyPr wrap="square" rtlCol="0" anchor="ctr"/>
-          <a:lstStyle/>
-          <a:p>
-            <a:pPr algn="l" indent="0" marL="0">
-              <a:buNone/>
-            </a:pPr>
-            <a:r>
-              <a:rPr lang="en-US" sz="1100" dirty="0">
+            <a:off x="594360" y="3108960"/>
+            <a:ext cx="3749040" cy="457200"/>
+          </a:xfrm>
+          <a:prstGeom prst="rect">
+            <a:avLst/>
+          </a:prstGeom>
+          <a:noFill/>
+          <a:ln/>
+        </p:spPr>
+        <p:txBody>
+          <a:bodyPr wrap="square" rtlCol="0" anchor="ctr"/>
+          <a:lstStyle/>
+          <a:p>
+            <a:pPr algn="l" indent="0" marL="0">
+              <a:buNone/>
+            </a:pPr>
+            <a:r>
+              <a:rPr lang="en-US" sz="1000" dirty="0">
                 <a:solidFill>
                   <a:srgbClr val="000000"/>
                 </a:solidFill>
@@ -2724,7 +2724,7 @@
               </a:rPr>
               <a:t>✗ 在群里@所有人，疯狂预警</a:t>
             </a:r>
-            <a:endParaRPr lang="en-US" sz="1100" dirty="0"/>
+            <a:endParaRPr lang="en-US" sz="1000" dirty="0"/>
           </a:p>
         </p:txBody>
       </p:sp>
@@ -2736,8 +2736,8 @@
         </p:nvSpPr>
         <p:spPr>
           <a:xfrm>
-            <a:off x="4663440" y="1737360"/>
-            <a:ext cx="4023360" cy="548640"/>
+            <a:off x="4663440" y="1600200"/>
+            <a:ext cx="4023360" cy="457200"/>
           </a:xfrm>
           <a:prstGeom prst="rect">
             <a:avLst/>
@@ -2756,24 +2756,24 @@
         </p:nvSpPr>
         <p:spPr>
           <a:xfrm>
-            <a:off x="4800600" y="1737360"/>
-            <a:ext cx="3749040" cy="548640"/>
-          </a:xfrm>
-          <a:prstGeom prst="rect">
-            <a:avLst/>
-          </a:prstGeom>
-          <a:noFill/>
-          <a:ln/>
-        </p:spPr>
-        <p:txBody>
-          <a:bodyPr wrap="square" rtlCol="0" anchor="ctr"/>
-          <a:lstStyle/>
-          <a:p>
-            <a:pPr algn="l" indent="0" marL="0">
-              <a:buNone/>
-            </a:pPr>
-            <a:r>
-              <a:rPr lang="en-US" sz="1100" dirty="0">
+            <a:off x="4800600" y="1600200"/>
+            <a:ext cx="3749040" cy="457200"/>
+          </a:xfrm>
+          <a:prstGeom prst="rect">
+            <a:avLst/>
+          </a:prstGeom>
+          <a:noFill/>
+          <a:ln/>
+        </p:spPr>
+        <p:txBody>
+          <a:bodyPr wrap="square" rtlCol="0" anchor="ctr"/>
+          <a:lstStyle/>
+          <a:p>
+            <a:pPr algn="l" indent="0" marL="0">
+              <a:buNone/>
+            </a:pPr>
+            <a:r>
+              <a:rPr lang="en-US" sz="1000" dirty="0">
                 <a:solidFill>
                   <a:srgbClr val="000000"/>
                 </a:solidFill>
@@ -2783,7 +2783,7 @@
               </a:rPr>
               <a:t>✓ 只有头部供应商个别问题</a:t>
             </a:r>
-            <a:endParaRPr lang="en-US" sz="1100" dirty="0"/>
+            <a:endParaRPr lang="en-US" sz="1000" dirty="0"/>
           </a:p>
         </p:txBody>
       </p:sp>
@@ -2795,8 +2795,8 @@
         </p:nvSpPr>
         <p:spPr>
           <a:xfrm>
-            <a:off x="4663440" y="2331720"/>
-            <a:ext cx="4023360" cy="548640"/>
+            <a:off x="4663440" y="2103120"/>
+            <a:ext cx="4023360" cy="457200"/>
           </a:xfrm>
           <a:prstGeom prst="rect">
             <a:avLst/>
@@ -2815,24 +2815,24 @@
         </p:nvSpPr>
         <p:spPr>
           <a:xfrm>
-            <a:off x="4800600" y="2331720"/>
-            <a:ext cx="3749040" cy="548640"/>
-          </a:xfrm>
-          <a:prstGeom prst="rect">
-            <a:avLst/>
-          </a:prstGeom>
-          <a:noFill/>
-          <a:ln/>
-        </p:spPr>
-        <p:txBody>
-          <a:bodyPr wrap="square" rtlCol="0" anchor="ctr"/>
-          <a:lstStyle/>
-          <a:p>
-            <a:pPr algn="l" indent="0" marL="0">
-              <a:buNone/>
-            </a:pPr>
-            <a:r>
-              <a:rPr lang="en-US" sz="1100" dirty="0">
+            <a:off x="4800600" y="2103120"/>
+            <a:ext cx="3749040" cy="457200"/>
+          </a:xfrm>
+          <a:prstGeom prst="rect">
+            <a:avLst/>
+          </a:prstGeom>
+          <a:noFill/>
+          <a:ln/>
+        </p:spPr>
+        <p:txBody>
+          <a:bodyPr wrap="square" rtlCol="0" anchor="ctr"/>
+          <a:lstStyle/>
+          <a:p>
+            <a:pPr algn="l" indent="0" marL="0">
+              <a:buNone/>
+            </a:pPr>
+            <a:r>
+              <a:rPr lang="en-US" sz="1000" dirty="0">
                 <a:solidFill>
                   <a:srgbClr val="000000"/>
                 </a:solidFill>
@@ -2842,7 +2842,7 @@
               </a:rPr>
               <a:t>✓ 激励可以放到 4 月继续发</a:t>
             </a:r>
-            <a:endParaRPr lang="en-US" sz="1100" dirty="0"/>
+            <a:endParaRPr lang="en-US" sz="1000" dirty="0"/>
           </a:p>
         </p:txBody>
       </p:sp>
@@ -2854,8 +2854,8 @@
         </p:nvSpPr>
         <p:spPr>
           <a:xfrm>
-            <a:off x="4663440" y="2926080"/>
-            <a:ext cx="4023360" cy="548640"/>
+            <a:off x="4663440" y="2606040"/>
+            <a:ext cx="4023360" cy="457200"/>
           </a:xfrm>
           <a:prstGeom prst="rect">
             <a:avLst/>
@@ -2874,24 +2874,24 @@
         </p:nvSpPr>
         <p:spPr>
           <a:xfrm>
-            <a:off x="4800600" y="2926080"/>
-            <a:ext cx="3749040" cy="548640"/>
-          </a:xfrm>
-          <a:prstGeom prst="rect">
-            <a:avLst/>
-          </a:prstGeom>
-          <a:noFill/>
-          <a:ln/>
-        </p:spPr>
-        <p:txBody>
-          <a:bodyPr wrap="square" rtlCol="0" anchor="ctr"/>
-          <a:lstStyle/>
-          <a:p>
-            <a:pPr algn="l" indent="0" marL="0">
-              <a:buNone/>
-            </a:pPr>
-            <a:r>
-              <a:rPr lang="en-US" sz="1100" dirty="0">
+            <a:off x="4800600" y="2606040"/>
+            <a:ext cx="3749040" cy="457200"/>
+          </a:xfrm>
+          <a:prstGeom prst="rect">
+            <a:avLst/>
+          </a:prstGeom>
+          <a:noFill/>
+          <a:ln/>
+        </p:spPr>
+        <p:txBody>
+          <a:bodyPr wrap="square" rtlCol="0" anchor="ctr"/>
+          <a:lstStyle/>
+          <a:p>
+            <a:pPr algn="l" indent="0" marL="0">
+              <a:buNone/>
+            </a:pPr>
+            <a:r>
+              <a:rPr lang="en-US" sz="1000" dirty="0">
                 <a:solidFill>
                   <a:srgbClr val="000000"/>
                 </a:solidFill>
@@ -2901,7 +2901,7 @@
               </a:rPr>
               <a:t>✓ 激励是策略组定的（多方共识）</a:t>
             </a:r>
-            <a:endParaRPr lang="en-US" sz="1100" dirty="0"/>
+            <a:endParaRPr lang="en-US" sz="1000" dirty="0"/>
           </a:p>
         </p:txBody>
       </p:sp>
@@ -2913,8 +2913,8 @@
         </p:nvSpPr>
         <p:spPr>
           <a:xfrm>
-            <a:off x="4663440" y="3520440"/>
-            <a:ext cx="4023360" cy="548640"/>
+            <a:off x="4663440" y="3108960"/>
+            <a:ext cx="4023360" cy="457200"/>
           </a:xfrm>
           <a:prstGeom prst="rect">
             <a:avLst/>
@@ -2933,24 +2933,24 @@
         </p:nvSpPr>
         <p:spPr>
           <a:xfrm>
-            <a:off x="4800600" y="3520440"/>
-            <a:ext cx="3749040" cy="548640"/>
-          </a:xfrm>
-          <a:prstGeom prst="rect">
-            <a:avLst/>
-          </a:prstGeom>
-          <a:noFill/>
-          <a:ln/>
-        </p:spPr>
-        <p:txBody>
-          <a:bodyPr wrap="square" rtlCol="0" anchor="ctr"/>
-          <a:lstStyle/>
-          <a:p>
-            <a:pPr algn="l" indent="0" marL="0">
-              <a:buNone/>
-            </a:pPr>
-            <a:r>
-              <a:rPr lang="en-US" sz="1100" dirty="0">
+            <a:off x="4800600" y="3108960"/>
+            <a:ext cx="3749040" cy="457200"/>
+          </a:xfrm>
+          <a:prstGeom prst="rect">
+            <a:avLst/>
+          </a:prstGeom>
+          <a:noFill/>
+          <a:ln/>
+        </p:spPr>
+        <p:txBody>
+          <a:bodyPr wrap="square" rtlCol="0" anchor="ctr"/>
+          <a:lstStyle/>
+          <a:p>
+            <a:pPr algn="l" indent="0" marL="0">
+              <a:buNone/>
+            </a:pPr>
+            <a:r>
+              <a:rPr lang="en-US" sz="1000" dirty="0">
                 <a:solidFill>
                   <a:srgbClr val="000000"/>
                 </a:solidFill>
@@ -2960,7 +2960,7 @@
               </a:rPr>
               <a:t>✓ 交接期信息真空、数据中断</a:t>
             </a:r>
-            <a:endParaRPr lang="en-US" sz="1100" dirty="0"/>
+            <a:endParaRPr lang="en-US" sz="1000" dirty="0"/>
           </a:p>
         </p:txBody>
       </p:sp>
@@ -2972,63 +2972,63 @@
         </p:nvSpPr>
         <p:spPr>
           <a:xfrm>
+            <a:off x="457200" y="3657600"/>
+            <a:ext cx="8229600" cy="228600"/>
+          </a:xfrm>
+          <a:prstGeom prst="rect">
+            <a:avLst/>
+          </a:prstGeom>
+          <a:noFill/>
+          <a:ln/>
+        </p:spPr>
+        <p:txBody>
+          <a:bodyPr wrap="square" rtlCol="0" anchor="ctr"/>
+          <a:lstStyle/>
+          <a:p>
+            <a:pPr algn="l" indent="0" marL="0">
+              <a:buNone/>
+            </a:pPr>
+            <a:r>
+              <a:rPr lang="en-US" sz="1300" b="1" dirty="0">
+                <a:solidFill>
+                  <a:srgbClr val="000000"/>
+                </a:solidFill>
+                <a:latin typeface="Microsoft YaHei" pitchFamily="34" charset="0"/>
+                <a:ea typeface="Microsoft YaHei" pitchFamily="34" charset="-122"/>
+                <a:cs typeface="Microsoft YaHei" pitchFamily="34" charset="-120"/>
+              </a:rPr>
+              <a:t>核心矛盾</a:t>
+            </a:r>
+            <a:endParaRPr lang="en-US" sz="1300" dirty="0"/>
+          </a:p>
+        </p:txBody>
+      </p:sp>
+      <p:sp>
+        <p:nvSpPr>
+          <p:cNvPr id="25" name="Text 23"/>
+          <p:cNvSpPr/>
+          <p:nvPr/>
+        </p:nvSpPr>
+        <p:spPr>
+          <a:xfrm>
             <a:off x="457200" y="3931920"/>
-            <a:ext cx="8229600" cy="274320"/>
-          </a:xfrm>
-          <a:prstGeom prst="rect">
-            <a:avLst/>
-          </a:prstGeom>
-          <a:noFill/>
-          <a:ln/>
-        </p:spPr>
-        <p:txBody>
-          <a:bodyPr wrap="square" rtlCol="0" anchor="ctr"/>
-          <a:lstStyle/>
-          <a:p>
-            <a:pPr algn="l" indent="0" marL="0">
-              <a:buNone/>
-            </a:pPr>
-            <a:r>
-              <a:rPr lang="en-US" sz="1400" b="1" dirty="0">
-                <a:solidFill>
-                  <a:srgbClr val="000000"/>
-                </a:solidFill>
-                <a:latin typeface="Microsoft YaHei" pitchFamily="34" charset="0"/>
-                <a:ea typeface="Microsoft YaHei" pitchFamily="34" charset="-122"/>
-                <a:cs typeface="Microsoft YaHei" pitchFamily="34" charset="-120"/>
-              </a:rPr>
-              <a:t>核心矛盾</a:t>
-            </a:r>
-            <a:endParaRPr lang="en-US" sz="1400" dirty="0"/>
-          </a:p>
-        </p:txBody>
-      </p:sp>
-      <p:sp>
-        <p:nvSpPr>
-          <p:cNvPr id="25" name="Text 23"/>
-          <p:cNvSpPr/>
-          <p:nvPr/>
-        </p:nvSpPr>
-        <p:spPr>
-          <a:xfrm>
-            <a:off x="457200" y="4251960"/>
-            <a:ext cx="3931920" cy="201168"/>
-          </a:xfrm>
-          <a:prstGeom prst="rect">
-            <a:avLst/>
-          </a:prstGeom>
-          <a:noFill/>
-          <a:ln/>
-        </p:spPr>
-        <p:txBody>
-          <a:bodyPr wrap="square" rtlCol="0" anchor="ctr"/>
-          <a:lstStyle/>
-          <a:p>
-            <a:pPr algn="l" indent="0" marL="0">
-              <a:buNone/>
-            </a:pPr>
-            <a:r>
-              <a:rPr lang="en-US" sz="1100" b="1" dirty="0">
+            <a:ext cx="3931920" cy="164592"/>
+          </a:xfrm>
+          <a:prstGeom prst="rect">
+            <a:avLst/>
+          </a:prstGeom>
+          <a:noFill/>
+          <a:ln/>
+        </p:spPr>
+        <p:txBody>
+          <a:bodyPr wrap="square" rtlCol="0" anchor="ctr"/>
+          <a:lstStyle/>
+          <a:p>
+            <a:pPr algn="l" indent="0" marL="0">
+              <a:buNone/>
+            </a:pPr>
+            <a:r>
+              <a:rPr lang="en-US" sz="1000" b="1" dirty="0">
                 <a:solidFill>
                   <a:srgbClr val="D70015"/>
                 </a:solidFill>
@@ -3036,9 +3036,9 @@
                 <a:ea typeface="Microsoft YaHei" pitchFamily="34" charset="-122"/>
                 <a:cs typeface="Microsoft YaHei" pitchFamily="34" charset="-120"/>
               </a:rPr>
-              <a:t>• 选择性攻击</a:t>
-            </a:r>
-            <a:endParaRPr lang="en-US" sz="1100" dirty="0"/>
+              <a:t>· 选择性攻击</a:t>
+            </a:r>
+            <a:endParaRPr lang="en-US" sz="1000" dirty="0"/>
           </a:p>
         </p:txBody>
       </p:sp>
@@ -3050,24 +3050,24 @@
         </p:nvSpPr>
         <p:spPr>
           <a:xfrm>
-            <a:off x="457200" y="4434840"/>
-            <a:ext cx="3931920" cy="274320"/>
-          </a:xfrm>
-          <a:prstGeom prst="rect">
-            <a:avLst/>
-          </a:prstGeom>
-          <a:noFill/>
-          <a:ln/>
-        </p:spPr>
-        <p:txBody>
-          <a:bodyPr wrap="square" rtlCol="0" anchor="ctr"/>
-          <a:lstStyle/>
-          <a:p>
-            <a:pPr algn="l" indent="0" marL="0">
-              <a:buNone/>
-            </a:pPr>
-            <a:r>
-              <a:rPr lang="en-US" sz="1000" dirty="0">
+            <a:off x="457200" y="4096512"/>
+            <a:ext cx="3931920" cy="228600"/>
+          </a:xfrm>
+          <a:prstGeom prst="rect">
+            <a:avLst/>
+          </a:prstGeom>
+          <a:noFill/>
+          <a:ln/>
+        </p:spPr>
+        <p:txBody>
+          <a:bodyPr wrap="square" rtlCol="0" anchor="ctr"/>
+          <a:lstStyle/>
+          <a:p>
+            <a:pPr algn="l" indent="0" marL="0">
+              <a:buNone/>
+            </a:pPr>
+            <a:r>
+              <a:rPr lang="en-US" sz="900" dirty="0">
                 <a:solidFill>
                   <a:srgbClr val="666666"/>
                 </a:solidFill>
@@ -3077,36 +3077,114 @@
               </a:rPr>
               <a:t>只攻击服务组，不攻击策略组（激励是策略组定的）</a:t>
             </a:r>
+            <a:endParaRPr lang="en-US" sz="900" dirty="0"/>
+          </a:p>
+        </p:txBody>
+      </p:sp>
+      <p:sp>
+        <p:nvSpPr>
+          <p:cNvPr id="27" name="Text 25"/>
+          <p:cNvSpPr/>
+          <p:nvPr/>
+        </p:nvSpPr>
+        <p:spPr>
+          <a:xfrm>
+            <a:off x="4572000" y="3931920"/>
+            <a:ext cx="3931920" cy="164592"/>
+          </a:xfrm>
+          <a:prstGeom prst="rect">
+            <a:avLst/>
+          </a:prstGeom>
+          <a:noFill/>
+          <a:ln/>
+        </p:spPr>
+        <p:txBody>
+          <a:bodyPr wrap="square" rtlCol="0" anchor="ctr"/>
+          <a:lstStyle/>
+          <a:p>
+            <a:pPr algn="l" indent="0" marL="0">
+              <a:buNone/>
+            </a:pPr>
+            <a:r>
+              <a:rPr lang="en-US" sz="1000" b="1" dirty="0">
+                <a:solidFill>
+                  <a:srgbClr val="D70015"/>
+                </a:solidFill>
+                <a:latin typeface="Microsoft YaHei" pitchFamily="34" charset="0"/>
+                <a:ea typeface="Microsoft YaHei" pitchFamily="34" charset="-122"/>
+                <a:cs typeface="Microsoft YaHei" pitchFamily="34" charset="-120"/>
+              </a:rPr>
+              <a:t>· 转移视线</a:t>
+            </a:r>
             <a:endParaRPr lang="en-US" sz="1000" dirty="0"/>
           </a:p>
         </p:txBody>
       </p:sp>
       <p:sp>
         <p:nvSpPr>
-          <p:cNvPr id="27" name="Text 25"/>
-          <p:cNvSpPr/>
-          <p:nvPr/>
-        </p:nvSpPr>
-        <p:spPr>
-          <a:xfrm>
-            <a:off x="4572000" y="4251960"/>
-            <a:ext cx="3931920" cy="201168"/>
-          </a:xfrm>
-          <a:prstGeom prst="rect">
-            <a:avLst/>
-          </a:prstGeom>
-          <a:noFill/>
-          <a:ln/>
-        </p:spPr>
-        <p:txBody>
-          <a:bodyPr wrap="square" rtlCol="0" anchor="ctr"/>
-          <a:lstStyle/>
-          <a:p>
-            <a:pPr algn="l" indent="0" marL="0">
-              <a:buNone/>
-            </a:pPr>
-            <a:r>
-              <a:rPr lang="en-US" sz="1100" b="1" dirty="0">
+          <p:cNvPr id="28" name="Text 26"/>
+          <p:cNvSpPr/>
+          <p:nvPr/>
+        </p:nvSpPr>
+        <p:spPr>
+          <a:xfrm>
+            <a:off x="4572000" y="4096512"/>
+            <a:ext cx="3931920" cy="228600"/>
+          </a:xfrm>
+          <a:prstGeom prst="rect">
+            <a:avLst/>
+          </a:prstGeom>
+          <a:noFill/>
+          <a:ln/>
+        </p:spPr>
+        <p:txBody>
+          <a:bodyPr wrap="square" rtlCol="0" anchor="ctr"/>
+          <a:lstStyle/>
+          <a:p>
+            <a:pPr algn="l" indent="0" marL="0">
+              <a:buNone/>
+            </a:pPr>
+            <a:r>
+              <a:rPr lang="en-US" sz="900" dirty="0">
+                <a:solidFill>
+                  <a:srgbClr val="666666"/>
+                </a:solidFill>
+                <a:latin typeface="Microsoft YaHei" pitchFamily="34" charset="0"/>
+                <a:ea typeface="Microsoft YaHei" pitchFamily="34" charset="-122"/>
+                <a:cs typeface="Microsoft YaHei" pitchFamily="34" charset="-120"/>
+              </a:rPr>
+              <a:t>把"交接期问题"转移到"激励方案问题"</a:t>
+            </a:r>
+            <a:endParaRPr lang="en-US" sz="900" dirty="0"/>
+          </a:p>
+        </p:txBody>
+      </p:sp>
+      <p:sp>
+        <p:nvSpPr>
+          <p:cNvPr id="29" name="Text 27"/>
+          <p:cNvSpPr/>
+          <p:nvPr/>
+        </p:nvSpPr>
+        <p:spPr>
+          <a:xfrm>
+            <a:off x="457200" y="4389120"/>
+            <a:ext cx="3931920" cy="164592"/>
+          </a:xfrm>
+          <a:prstGeom prst="rect">
+            <a:avLst/>
+          </a:prstGeom>
+          <a:noFill/>
+          <a:ln/>
+        </p:spPr>
+        <p:txBody>
+          <a:bodyPr wrap="square" rtlCol="0" anchor="ctr"/>
+          <a:lstStyle/>
+          <a:p>
+            <a:pPr algn="l" indent="0" marL="0">
+              <a:buNone/>
+            </a:pPr>
+            <a:r>
+              <a:rPr lang="en-US" sz="1000" b="1" dirty="0">
                 <a:solidFill>
                   <a:srgbClr val="D70015"/>
                 </a:solidFill>
@@ -3114,38 +3192,38 @@
                 <a:ea typeface="Microsoft YaHei" pitchFamily="34" charset="-122"/>
                 <a:cs typeface="Microsoft YaHei" pitchFamily="34" charset="-120"/>
               </a:rPr>
-              <a:t>• 转移视线</a:t>
-            </a:r>
-            <a:endParaRPr lang="en-US" sz="1100" dirty="0"/>
-          </a:p>
-        </p:txBody>
-      </p:sp>
-      <p:sp>
-        <p:nvSpPr>
-          <p:cNvPr id="28" name="Text 26"/>
-          <p:cNvSpPr/>
-          <p:nvPr/>
-        </p:nvSpPr>
-        <p:spPr>
-          <a:xfrm>
-            <a:off x="4572000" y="4434840"/>
-            <a:ext cx="3931920" cy="274320"/>
-          </a:xfrm>
-          <a:prstGeom prst="rect">
-            <a:avLst/>
-          </a:prstGeom>
-          <a:noFill/>
-          <a:ln/>
-        </p:spPr>
-        <p:txBody>
-          <a:bodyPr wrap="square" rtlCol="0" anchor="ctr"/>
-          <a:lstStyle/>
-          <a:p>
-            <a:pPr algn="l" indent="0" marL="0">
-              <a:buNone/>
-            </a:pPr>
-            <a:r>
-              <a:rPr lang="en-US" sz="1000" dirty="0">
+              <a:t>· 保护关系网</a:t>
+            </a:r>
+            <a:endParaRPr lang="en-US" sz="1000" dirty="0"/>
+          </a:p>
+        </p:txBody>
+      </p:sp>
+      <p:sp>
+        <p:nvSpPr>
+          <p:cNvPr id="30" name="Text 28"/>
+          <p:cNvSpPr/>
+          <p:nvPr/>
+        </p:nvSpPr>
+        <p:spPr>
+          <a:xfrm>
+            <a:off x="457200" y="4553712"/>
+            <a:ext cx="3931920" cy="228600"/>
+          </a:xfrm>
+          <a:prstGeom prst="rect">
+            <a:avLst/>
+          </a:prstGeom>
+          <a:noFill/>
+          <a:ln/>
+        </p:spPr>
+        <p:txBody>
+          <a:bodyPr wrap="square" rtlCol="0" anchor="ctr"/>
+          <a:lstStyle/>
+          <a:p>
+            <a:pPr algn="l" indent="0" marL="0">
+              <a:buNone/>
+            </a:pPr>
+            <a:r>
+              <a:rPr lang="en-US" sz="900" dirty="0">
                 <a:solidFill>
                   <a:srgbClr val="666666"/>
                 </a:solidFill>
@@ -3153,7 +3231,46 @@
                 <a:ea typeface="Microsoft YaHei" pitchFamily="34" charset="-122"/>
                 <a:cs typeface="Microsoft YaHei" pitchFamily="34" charset="-120"/>
               </a:rPr>
-              <a:t>把"交接期问题"转移到"激励方案问题"</a:t>
+              <a:t>他和刘伟佳关系好，不提策略组配合问题</a:t>
+            </a:r>
+            <a:endParaRPr lang="en-US" sz="900" dirty="0"/>
+          </a:p>
+        </p:txBody>
+      </p:sp>
+      <p:sp>
+        <p:nvSpPr>
+          <p:cNvPr id="31" name="Text 29"/>
+          <p:cNvSpPr/>
+          <p:nvPr/>
+        </p:nvSpPr>
+        <p:spPr>
+          <a:xfrm>
+            <a:off x="4572000" y="4389120"/>
+            <a:ext cx="3931920" cy="164592"/>
+          </a:xfrm>
+          <a:prstGeom prst="rect">
+            <a:avLst/>
+          </a:prstGeom>
+          <a:noFill/>
+          <a:ln/>
+        </p:spPr>
+        <p:txBody>
+          <a:bodyPr wrap="square" rtlCol="0" anchor="ctr"/>
+          <a:lstStyle/>
+          <a:p>
+            <a:pPr algn="l" indent="0" marL="0">
+              <a:buNone/>
+            </a:pPr>
+            <a:r>
+              <a:rPr lang="en-US" sz="1000" b="1" dirty="0">
+                <a:solidFill>
+                  <a:srgbClr val="D70015"/>
+                </a:solidFill>
+                <a:latin typeface="Microsoft YaHei" pitchFamily="34" charset="0"/>
+                <a:ea typeface="Microsoft YaHei" pitchFamily="34" charset="-122"/>
+                <a:cs typeface="Microsoft YaHei" pitchFamily="34" charset="-120"/>
+              </a:rPr>
+              <a:t>· 破坏安全感</a:t>
             </a:r>
             <a:endParaRPr lang="en-US" sz="1000" dirty="0"/>
           </a:p>
@@ -3161,69 +3278,30 @@
       </p:sp>
       <p:sp>
         <p:nvSpPr>
-          <p:cNvPr id="29" name="Text 27"/>
-          <p:cNvSpPr/>
-          <p:nvPr/>
-        </p:nvSpPr>
-        <p:spPr>
-          <a:xfrm>
-            <a:off x="457200" y="4754880"/>
-            <a:ext cx="3931920" cy="201168"/>
-          </a:xfrm>
-          <a:prstGeom prst="rect">
-            <a:avLst/>
-          </a:prstGeom>
-          <a:noFill/>
-          <a:ln/>
-        </p:spPr>
-        <p:txBody>
-          <a:bodyPr wrap="square" rtlCol="0" anchor="ctr"/>
-          <a:lstStyle/>
-          <a:p>
-            <a:pPr algn="l" indent="0" marL="0">
-              <a:buNone/>
-            </a:pPr>
-            <a:r>
-              <a:rPr lang="en-US" sz="1100" b="1" dirty="0">
-                <a:solidFill>
-                  <a:srgbClr val="D70015"/>
-                </a:solidFill>
-                <a:latin typeface="Microsoft YaHei" pitchFamily="34" charset="0"/>
-                <a:ea typeface="Microsoft YaHei" pitchFamily="34" charset="-122"/>
-                <a:cs typeface="Microsoft YaHei" pitchFamily="34" charset="-120"/>
-              </a:rPr>
-              <a:t>• 保护关系网</a:t>
-            </a:r>
-            <a:endParaRPr lang="en-US" sz="1100" dirty="0"/>
-          </a:p>
-        </p:txBody>
-      </p:sp>
-      <p:sp>
-        <p:nvSpPr>
-          <p:cNvPr id="30" name="Text 28"/>
-          <p:cNvSpPr/>
-          <p:nvPr/>
-        </p:nvSpPr>
-        <p:spPr>
-          <a:xfrm>
-            <a:off x="457200" y="4937760"/>
-            <a:ext cx="3931920" cy="274320"/>
-          </a:xfrm>
-          <a:prstGeom prst="rect">
-            <a:avLst/>
-          </a:prstGeom>
-          <a:noFill/>
-          <a:ln/>
-        </p:spPr>
-        <p:txBody>
-          <a:bodyPr wrap="square" rtlCol="0" anchor="ctr"/>
-          <a:lstStyle/>
-          <a:p>
-            <a:pPr algn="l" indent="0" marL="0">
-              <a:buNone/>
-            </a:pPr>
-            <a:r>
-              <a:rPr lang="en-US" sz="1000" dirty="0">
+          <p:cNvPr id="32" name="Text 30"/>
+          <p:cNvSpPr/>
+          <p:nvPr/>
+        </p:nvSpPr>
+        <p:spPr>
+          <a:xfrm>
+            <a:off x="4572000" y="4553712"/>
+            <a:ext cx="3931920" cy="228600"/>
+          </a:xfrm>
+          <a:prstGeom prst="rect">
+            <a:avLst/>
+          </a:prstGeom>
+          <a:noFill/>
+          <a:ln/>
+        </p:spPr>
+        <p:txBody>
+          <a:bodyPr wrap="square" rtlCol="0" anchor="ctr"/>
+          <a:lstStyle/>
+          <a:p>
+            <a:pPr algn="l" indent="0" marL="0">
+              <a:buNone/>
+            </a:pPr>
+            <a:r>
+              <a:rPr lang="en-US" sz="900" dirty="0">
                 <a:solidFill>
                   <a:srgbClr val="666666"/>
                 </a:solidFill>
@@ -3231,87 +3309,9 @@
                 <a:ea typeface="Microsoft YaHei" pitchFamily="34" charset="-122"/>
                 <a:cs typeface="Microsoft YaHei" pitchFamily="34" charset="-120"/>
               </a:rPr>
-              <a:t>他和刘伟佳关系好，不提策略组配合问题</a:t>
-            </a:r>
-            <a:endParaRPr lang="en-US" sz="1000" dirty="0"/>
-          </a:p>
-        </p:txBody>
-      </p:sp>
-      <p:sp>
-        <p:nvSpPr>
-          <p:cNvPr id="31" name="Text 29"/>
-          <p:cNvSpPr/>
-          <p:nvPr/>
-        </p:nvSpPr>
-        <p:spPr>
-          <a:xfrm>
-            <a:off x="4572000" y="4754880"/>
-            <a:ext cx="3931920" cy="201168"/>
-          </a:xfrm>
-          <a:prstGeom prst="rect">
-            <a:avLst/>
-          </a:prstGeom>
-          <a:noFill/>
-          <a:ln/>
-        </p:spPr>
-        <p:txBody>
-          <a:bodyPr wrap="square" rtlCol="0" anchor="ctr"/>
-          <a:lstStyle/>
-          <a:p>
-            <a:pPr algn="l" indent="0" marL="0">
-              <a:buNone/>
-            </a:pPr>
-            <a:r>
-              <a:rPr lang="en-US" sz="1100" b="1" dirty="0">
-                <a:solidFill>
-                  <a:srgbClr val="D70015"/>
-                </a:solidFill>
-                <a:latin typeface="Microsoft YaHei" pitchFamily="34" charset="0"/>
-                <a:ea typeface="Microsoft YaHei" pitchFamily="34" charset="-122"/>
-                <a:cs typeface="Microsoft YaHei" pitchFamily="34" charset="-120"/>
-              </a:rPr>
-              <a:t>• 破坏安全感</a:t>
-            </a:r>
-            <a:endParaRPr lang="en-US" sz="1100" dirty="0"/>
-          </a:p>
-        </p:txBody>
-      </p:sp>
-      <p:sp>
-        <p:nvSpPr>
-          <p:cNvPr id="32" name="Text 30"/>
-          <p:cNvSpPr/>
-          <p:nvPr/>
-        </p:nvSpPr>
-        <p:spPr>
-          <a:xfrm>
-            <a:off x="4572000" y="4937760"/>
-            <a:ext cx="3931920" cy="274320"/>
-          </a:xfrm>
-          <a:prstGeom prst="rect">
-            <a:avLst/>
-          </a:prstGeom>
-          <a:noFill/>
-          <a:ln/>
-        </p:spPr>
-        <p:txBody>
-          <a:bodyPr wrap="square" rtlCol="0" anchor="ctr"/>
-          <a:lstStyle/>
-          <a:p>
-            <a:pPr algn="l" indent="0" marL="0">
-              <a:buNone/>
-            </a:pPr>
-            <a:r>
-              <a:rPr lang="en-US" sz="1000" dirty="0">
-                <a:solidFill>
-                  <a:srgbClr val="666666"/>
-                </a:solidFill>
-                <a:latin typeface="Microsoft YaHei" pitchFamily="34" charset="0"/>
-                <a:ea typeface="Microsoft YaHei" pitchFamily="34" charset="-122"/>
-                <a:cs typeface="Microsoft YaHei" pitchFamily="34" charset="-120"/>
-              </a:rPr>
               <a:t>群里制造对立，让大家都紧绷</a:t>
             </a:r>
-            <a:endParaRPr lang="en-US" sz="1000" dirty="0"/>
+            <a:endParaRPr lang="en-US" sz="900" dirty="0"/>
           </a:p>
         </p:txBody>
       </p:sp>
@@ -3453,8 +3453,8 @@
         </p:nvSpPr>
         <p:spPr>
           <a:xfrm>
-            <a:off x="457200" y="1371600"/>
-            <a:ext cx="1600200" cy="411480"/>
+            <a:off x="457200" y="1280160"/>
+            <a:ext cx="1600200" cy="365760"/>
           </a:xfrm>
           <a:prstGeom prst="rect">
             <a:avLst/>
@@ -3473,8 +3473,8 @@
         </p:nvSpPr>
         <p:spPr>
           <a:xfrm>
-            <a:off x="457200" y="1371600"/>
-            <a:ext cx="1600200" cy="411480"/>
+            <a:off x="457200" y="1280160"/>
+            <a:ext cx="1600200" cy="365760"/>
           </a:xfrm>
           <a:prstGeom prst="rect">
             <a:avLst/>
@@ -3490,7 +3490,7 @@
               <a:buNone/>
             </a:pPr>
             <a:r>
-              <a:rPr lang="en-US" sz="1600" b="1" dirty="0">
+              <a:rPr lang="en-US" sz="1400" b="1" dirty="0">
                 <a:solidFill>
                   <a:srgbClr val="FFFFFF"/>
                 </a:solidFill>
@@ -3500,7 +3500,7 @@
               </a:rPr>
               <a:t>01</a:t>
             </a:r>
-            <a:endParaRPr lang="en-US" sz="1600" dirty="0"/>
+            <a:endParaRPr lang="en-US" sz="1400" dirty="0"/>
           </a:p>
         </p:txBody>
       </p:sp>
@@ -3512,8 +3512,8 @@
         </p:nvSpPr>
         <p:spPr>
           <a:xfrm>
-            <a:off x="548640" y="1874520"/>
-            <a:ext cx="1417320" cy="320040"/>
+            <a:off x="548640" y="1737360"/>
+            <a:ext cx="1417320" cy="274320"/>
           </a:xfrm>
           <a:prstGeom prst="rect">
             <a:avLst/>
@@ -3529,7 +3529,7 @@
               <a:buNone/>
             </a:pPr>
             <a:r>
-              <a:rPr lang="en-US" sz="1200" b="1" dirty="0">
+              <a:rPr lang="en-US" sz="1100" b="1" dirty="0">
                 <a:solidFill>
                   <a:srgbClr val="000000"/>
                 </a:solidFill>
@@ -3539,7 +3539,7 @@
               </a:rPr>
               <a:t>选择性攻击</a:t>
             </a:r>
-            <a:endParaRPr lang="en-US" sz="1200" dirty="0"/>
+            <a:endParaRPr lang="en-US" sz="1100" dirty="0"/>
           </a:p>
         </p:txBody>
       </p:sp>
@@ -3551,8 +3551,8 @@
         </p:nvSpPr>
         <p:spPr>
           <a:xfrm>
-            <a:off x="548640" y="2240280"/>
-            <a:ext cx="1417320" cy="457200"/>
+            <a:off x="548640" y="2057400"/>
+            <a:ext cx="1417320" cy="411480"/>
           </a:xfrm>
           <a:prstGeom prst="rect">
             <a:avLst/>
@@ -3568,7 +3568,7 @@
               <a:buNone/>
             </a:pPr>
             <a:r>
-              <a:rPr lang="en-US" sz="1000" dirty="0">
+              <a:rPr lang="en-US" sz="900" dirty="0">
                 <a:solidFill>
                   <a:srgbClr val="666666"/>
                 </a:solidFill>
@@ -3578,7 +3578,7 @@
               </a:rPr>
               <a:t>只攻击服务组，不攻击策略组</a:t>
             </a:r>
-            <a:endParaRPr lang="en-US" sz="1000" dirty="0"/>
+            <a:endParaRPr lang="en-US" sz="900" dirty="0"/>
           </a:p>
         </p:txBody>
       </p:sp>
@@ -3590,8 +3590,8 @@
         </p:nvSpPr>
         <p:spPr>
           <a:xfrm>
-            <a:off x="548640" y="2788920"/>
-            <a:ext cx="1417320" cy="1645920"/>
+            <a:off x="548640" y="2560320"/>
+            <a:ext cx="1417320" cy="1783080"/>
           </a:xfrm>
           <a:prstGeom prst="rect">
             <a:avLst/>
@@ -3613,8 +3613,8 @@
         </p:nvSpPr>
         <p:spPr>
           <a:xfrm>
-            <a:off x="594360" y="2880360"/>
-            <a:ext cx="1325880" cy="1463040"/>
+            <a:off x="594360" y="2651760"/>
+            <a:ext cx="1325880" cy="1645920"/>
           </a:xfrm>
           <a:prstGeom prst="rect">
             <a:avLst/>
@@ -3630,7 +3630,7 @@
               <a:buNone/>
             </a:pPr>
             <a:r>
-              <a:rPr lang="en-US" sz="900" dirty="0">
+              <a:rPr lang="en-US" sz="800" dirty="0">
                 <a:solidFill>
                   <a:srgbClr val="666666"/>
                 </a:solidFill>
@@ -3640,7 +3640,7 @@
               </a:rPr>
               <a:t>激励是策略组定的，但他只说"激励有问题"</a:t>
             </a:r>
-            <a:endParaRPr lang="en-US" sz="900" dirty="0"/>
+            <a:endParaRPr lang="en-US" sz="800" dirty="0"/>
           </a:p>
         </p:txBody>
       </p:sp>
@@ -3652,8 +3652,8 @@
         </p:nvSpPr>
         <p:spPr>
           <a:xfrm>
-            <a:off x="2103120" y="1371600"/>
-            <a:ext cx="1600200" cy="411480"/>
+            <a:off x="2103120" y="1280160"/>
+            <a:ext cx="1600200" cy="365760"/>
           </a:xfrm>
           <a:prstGeom prst="rect">
             <a:avLst/>
@@ -3672,8 +3672,8 @@
         </p:nvSpPr>
         <p:spPr>
           <a:xfrm>
-            <a:off x="2103120" y="1371600"/>
-            <a:ext cx="1600200" cy="411480"/>
+            <a:off x="2103120" y="1280160"/>
+            <a:ext cx="1600200" cy="365760"/>
           </a:xfrm>
           <a:prstGeom prst="rect">
             <a:avLst/>
@@ -3689,7 +3689,7 @@
               <a:buNone/>
             </a:pPr>
             <a:r>
-              <a:rPr lang="en-US" sz="1600" b="1" dirty="0">
+              <a:rPr lang="en-US" sz="1400" b="1" dirty="0">
                 <a:solidFill>
                   <a:srgbClr val="FFFFFF"/>
                 </a:solidFill>
@@ -3699,7 +3699,7 @@
               </a:rPr>
               <a:t>02</a:t>
             </a:r>
-            <a:endParaRPr lang="en-US" sz="1600" dirty="0"/>
+            <a:endParaRPr lang="en-US" sz="1400" dirty="0"/>
           </a:p>
         </p:txBody>
       </p:sp>
@@ -3711,8 +3711,8 @@
         </p:nvSpPr>
         <p:spPr>
           <a:xfrm>
-            <a:off x="2194560" y="1874520"/>
-            <a:ext cx="1417320" cy="320040"/>
+            <a:off x="2194560" y="1737360"/>
+            <a:ext cx="1417320" cy="274320"/>
           </a:xfrm>
           <a:prstGeom prst="rect">
             <a:avLst/>
@@ -3728,7 +3728,7 @@
               <a:buNone/>
             </a:pPr>
             <a:r>
-              <a:rPr lang="en-US" sz="1200" b="1" dirty="0">
+              <a:rPr lang="en-US" sz="1100" b="1" dirty="0">
                 <a:solidFill>
                   <a:srgbClr val="000000"/>
                 </a:solidFill>
@@ -3738,7 +3738,7 @@
               </a:rPr>
               <a:t>群内表演</a:t>
             </a:r>
-            <a:endParaRPr lang="en-US" sz="1200" dirty="0"/>
+            <a:endParaRPr lang="en-US" sz="1100" dirty="0"/>
           </a:p>
         </p:txBody>
       </p:sp>
@@ -3750,8 +3750,8 @@
         </p:nvSpPr>
         <p:spPr>
           <a:xfrm>
-            <a:off x="2194560" y="2240280"/>
-            <a:ext cx="1417320" cy="457200"/>
+            <a:off x="2194560" y="2057400"/>
+            <a:ext cx="1417320" cy="411480"/>
           </a:xfrm>
           <a:prstGeom prst="rect">
             <a:avLst/>
@@ -3767,7 +3767,7 @@
               <a:buNone/>
             </a:pPr>
             <a:r>
-              <a:rPr lang="en-US" sz="1000" dirty="0">
+              <a:rPr lang="en-US" sz="900" dirty="0">
                 <a:solidFill>
                   <a:srgbClr val="666666"/>
                 </a:solidFill>
@@ -3777,7 +3777,7 @@
               </a:rPr>
               <a:t>在群里@所有人，密集同步</a:t>
             </a:r>
-            <a:endParaRPr lang="en-US" sz="1000" dirty="0"/>
+            <a:endParaRPr lang="en-US" sz="900" dirty="0"/>
           </a:p>
         </p:txBody>
       </p:sp>
@@ -3789,8 +3789,8 @@
         </p:nvSpPr>
         <p:spPr>
           <a:xfrm>
-            <a:off x="2194560" y="2788920"/>
-            <a:ext cx="1417320" cy="1645920"/>
+            <a:off x="2194560" y="2560320"/>
+            <a:ext cx="1417320" cy="1783080"/>
           </a:xfrm>
           <a:prstGeom prst="rect">
             <a:avLst/>
@@ -3812,8 +3812,8 @@
         </p:nvSpPr>
         <p:spPr>
           <a:xfrm>
-            <a:off x="2240280" y="2880360"/>
-            <a:ext cx="1325880" cy="1463040"/>
+            <a:off x="2240280" y="2651760"/>
+            <a:ext cx="1325880" cy="1645920"/>
           </a:xfrm>
           <a:prstGeom prst="rect">
             <a:avLst/>
@@ -3829,7 +3829,7 @@
               <a:buNone/>
             </a:pPr>
             <a:r>
-              <a:rPr lang="en-US" sz="900" dirty="0">
+              <a:rPr lang="en-US" sz="800" dirty="0">
                 <a:solidFill>
                   <a:srgbClr val="666666"/>
                 </a:solidFill>
@@ -3839,7 +3839,7 @@
               </a:rPr>
               <a:t>"疯狂地说自己在预警"= 强调"我在努力"</a:t>
             </a:r>
-            <a:endParaRPr lang="en-US" sz="900" dirty="0"/>
+            <a:endParaRPr lang="en-US" sz="800" dirty="0"/>
           </a:p>
         </p:txBody>
       </p:sp>
@@ -3851,8 +3851,8 @@
         </p:nvSpPr>
         <p:spPr>
           <a:xfrm>
-            <a:off x="3749040" y="1371600"/>
-            <a:ext cx="1600200" cy="411480"/>
+            <a:off x="3749040" y="1280160"/>
+            <a:ext cx="1600200" cy="365760"/>
           </a:xfrm>
           <a:prstGeom prst="rect">
             <a:avLst/>
@@ -3871,8 +3871,8 @@
         </p:nvSpPr>
         <p:spPr>
           <a:xfrm>
-            <a:off x="3749040" y="1371600"/>
-            <a:ext cx="1600200" cy="411480"/>
+            <a:off x="3749040" y="1280160"/>
+            <a:ext cx="1600200" cy="365760"/>
           </a:xfrm>
           <a:prstGeom prst="rect">
             <a:avLst/>
@@ -3888,7 +3888,7 @@
               <a:buNone/>
             </a:pPr>
             <a:r>
-              <a:rPr lang="en-US" sz="1600" b="1" dirty="0">
+              <a:rPr lang="en-US" sz="1400" b="1" dirty="0">
                 <a:solidFill>
                   <a:srgbClr val="FFFFFF"/>
                 </a:solidFill>
@@ -3898,7 +3898,7 @@
               </a:rPr>
               <a:t>03</a:t>
             </a:r>
-            <a:endParaRPr lang="en-US" sz="1600" dirty="0"/>
+            <a:endParaRPr lang="en-US" sz="1400" dirty="0"/>
           </a:p>
         </p:txBody>
       </p:sp>
@@ -3910,8 +3910,8 @@
         </p:nvSpPr>
         <p:spPr>
           <a:xfrm>
-            <a:off x="3840480" y="1874520"/>
-            <a:ext cx="1417320" cy="320040"/>
+            <a:off x="3840480" y="1737360"/>
+            <a:ext cx="1417320" cy="274320"/>
           </a:xfrm>
           <a:prstGeom prst="rect">
             <a:avLst/>
@@ -3927,7 +3927,7 @@
               <a:buNone/>
             </a:pPr>
             <a:r>
-              <a:rPr lang="en-US" sz="1200" b="1" dirty="0">
+              <a:rPr lang="en-US" sz="1100" b="1" dirty="0">
                 <a:solidFill>
                   <a:srgbClr val="000000"/>
                 </a:solidFill>
@@ -3937,7 +3937,7 @@
               </a:rPr>
               <a:t>道德绑架</a:t>
             </a:r>
-            <a:endParaRPr lang="en-US" sz="1200" dirty="0"/>
+            <a:endParaRPr lang="en-US" sz="1100" dirty="0"/>
           </a:p>
         </p:txBody>
       </p:sp>
@@ -3949,8 +3949,8 @@
         </p:nvSpPr>
         <p:spPr>
           <a:xfrm>
-            <a:off x="3840480" y="2240280"/>
-            <a:ext cx="1417320" cy="457200"/>
+            <a:off x="3840480" y="2057400"/>
+            <a:ext cx="1417320" cy="411480"/>
           </a:xfrm>
           <a:prstGeom prst="rect">
             <a:avLst/>
@@ -3966,7 +3966,7 @@
               <a:buNone/>
             </a:pPr>
             <a:r>
-              <a:rPr lang="en-US" sz="1000" dirty="0">
+              <a:rPr lang="en-US" sz="900" dirty="0">
                 <a:solidFill>
                   <a:srgbClr val="666666"/>
                 </a:solidFill>
@@ -3976,7 +3976,7 @@
               </a:rPr>
               <a:t>用情绪化数字制造恐慌</a:t>
             </a:r>
-            <a:endParaRPr lang="en-US" sz="1000" dirty="0"/>
+            <a:endParaRPr lang="en-US" sz="900" dirty="0"/>
           </a:p>
         </p:txBody>
       </p:sp>
@@ -3988,8 +3988,8 @@
         </p:nvSpPr>
         <p:spPr>
           <a:xfrm>
-            <a:off x="3840480" y="2788920"/>
-            <a:ext cx="1417320" cy="1645920"/>
+            <a:off x="3840480" y="2560320"/>
+            <a:ext cx="1417320" cy="1783080"/>
           </a:xfrm>
           <a:prstGeom prst="rect">
             <a:avLst/>
@@ -4011,8 +4011,8 @@
         </p:nvSpPr>
         <p:spPr>
           <a:xfrm>
-            <a:off x="3886200" y="2880360"/>
-            <a:ext cx="1325880" cy="1463040"/>
+            <a:off x="3886200" y="2651760"/>
+            <a:ext cx="1325880" cy="1645920"/>
           </a:xfrm>
           <a:prstGeom prst="rect">
             <a:avLst/>
@@ -4028,7 +4028,7 @@
               <a:buNone/>
             </a:pPr>
             <a:r>
-              <a:rPr lang="en-US" sz="900" dirty="0">
+              <a:rPr lang="en-US" sz="800" dirty="0">
                 <a:solidFill>
                   <a:srgbClr val="666666"/>
                 </a:solidFill>
@@ -4038,7 +4038,7 @@
               </a:rPr>
               <a:t>"影响 1400 个工人、5000 个家庭"</a:t>
             </a:r>
-            <a:endParaRPr lang="en-US" sz="900" dirty="0"/>
+            <a:endParaRPr lang="en-US" sz="800" dirty="0"/>
           </a:p>
         </p:txBody>
       </p:sp>
@@ -4050,8 +4050,8 @@
         </p:nvSpPr>
         <p:spPr>
           <a:xfrm>
-            <a:off x="5394960" y="1371600"/>
-            <a:ext cx="1600200" cy="411480"/>
+            <a:off x="5394960" y="1280160"/>
+            <a:ext cx="1600200" cy="365760"/>
           </a:xfrm>
           <a:prstGeom prst="rect">
             <a:avLst/>
@@ -4070,8 +4070,8 @@
         </p:nvSpPr>
         <p:spPr>
           <a:xfrm>
-            <a:off x="5394960" y="1371600"/>
-            <a:ext cx="1600200" cy="411480"/>
+            <a:off x="5394960" y="1280160"/>
+            <a:ext cx="1600200" cy="365760"/>
           </a:xfrm>
           <a:prstGeom prst="rect">
             <a:avLst/>
@@ -4087,7 +4087,7 @@
               <a:buNone/>
             </a:pPr>
             <a:r>
-              <a:rPr lang="en-US" sz="1600" b="1" dirty="0">
+              <a:rPr lang="en-US" sz="1400" b="1" dirty="0">
                 <a:solidFill>
                   <a:srgbClr val="FFFFFF"/>
                 </a:solidFill>
@@ -4097,7 +4097,7 @@
               </a:rPr>
               <a:t>04</a:t>
             </a:r>
-            <a:endParaRPr lang="en-US" sz="1600" dirty="0"/>
+            <a:endParaRPr lang="en-US" sz="1400" dirty="0"/>
           </a:p>
         </p:txBody>
       </p:sp>
@@ -4109,8 +4109,8 @@
         </p:nvSpPr>
         <p:spPr>
           <a:xfrm>
-            <a:off x="5486400" y="1874520"/>
-            <a:ext cx="1417320" cy="320040"/>
+            <a:off x="5486400" y="1737360"/>
+            <a:ext cx="1417320" cy="274320"/>
           </a:xfrm>
           <a:prstGeom prst="rect">
             <a:avLst/>
@@ -4126,7 +4126,7 @@
               <a:buNone/>
             </a:pPr>
             <a:r>
-              <a:rPr lang="en-US" sz="1200" b="1" dirty="0">
+              <a:rPr lang="en-US" sz="1100" b="1" dirty="0">
                 <a:solidFill>
                   <a:srgbClr val="000000"/>
                 </a:solidFill>
@@ -4136,7 +4136,7 @@
               </a:rPr>
               <a:t>转移视线</a:t>
             </a:r>
-            <a:endParaRPr lang="en-US" sz="1200" dirty="0"/>
+            <a:endParaRPr lang="en-US" sz="1100" dirty="0"/>
           </a:p>
         </p:txBody>
       </p:sp>
@@ -4148,8 +4148,8 @@
         </p:nvSpPr>
         <p:spPr>
           <a:xfrm>
-            <a:off x="5486400" y="2240280"/>
-            <a:ext cx="1417320" cy="457200"/>
+            <a:off x="5486400" y="2057400"/>
+            <a:ext cx="1417320" cy="411480"/>
           </a:xfrm>
           <a:prstGeom prst="rect">
             <a:avLst/>
@@ -4165,7 +4165,7 @@
               <a:buNone/>
             </a:pPr>
             <a:r>
-              <a:rPr lang="en-US" sz="1000" dirty="0">
+              <a:rPr lang="en-US" sz="900" dirty="0">
                 <a:solidFill>
                   <a:srgbClr val="666666"/>
                 </a:solidFill>
@@ -4175,7 +4175,7 @@
               </a:rPr>
               <a:t>把交接期问题转移到激励方案</a:t>
             </a:r>
-            <a:endParaRPr lang="en-US" sz="1000" dirty="0"/>
+            <a:endParaRPr lang="en-US" sz="900" dirty="0"/>
           </a:p>
         </p:txBody>
       </p:sp>
@@ -4187,8 +4187,8 @@
         </p:nvSpPr>
         <p:spPr>
           <a:xfrm>
-            <a:off x="5486400" y="2788920"/>
-            <a:ext cx="1417320" cy="1645920"/>
+            <a:off x="5486400" y="2560320"/>
+            <a:ext cx="1417320" cy="1783080"/>
           </a:xfrm>
           <a:prstGeom prst="rect">
             <a:avLst/>
@@ -4210,8 +4210,8 @@
         </p:nvSpPr>
         <p:spPr>
           <a:xfrm>
-            <a:off x="5532120" y="2880360"/>
-            <a:ext cx="1325880" cy="1463040"/>
+            <a:off x="5532120" y="2651760"/>
+            <a:ext cx="1325880" cy="1645920"/>
           </a:xfrm>
           <a:prstGeom prst="rect">
             <a:avLst/>
@@ -4227,7 +4227,7 @@
               <a:buNone/>
             </a:pPr>
             <a:r>
-              <a:rPr lang="en-US" sz="900" dirty="0">
+              <a:rPr lang="en-US" sz="800" dirty="0">
                 <a:solidFill>
                   <a:srgbClr val="666666"/>
                 </a:solidFill>
@@ -4237,7 +4237,7 @@
               </a:rPr>
               <a:t>不说"交接期信息真空"，只说"方案定得高"</a:t>
             </a:r>
-            <a:endParaRPr lang="en-US" sz="900" dirty="0"/>
+            <a:endParaRPr lang="en-US" sz="800" dirty="0"/>
           </a:p>
         </p:txBody>
       </p:sp>
@@ -4249,8 +4249,8 @@
         </p:nvSpPr>
         <p:spPr>
           <a:xfrm>
-            <a:off x="7040880" y="1371600"/>
-            <a:ext cx="1600200" cy="411480"/>
+            <a:off x="7040880" y="1280160"/>
+            <a:ext cx="1600200" cy="365760"/>
           </a:xfrm>
           <a:prstGeom prst="rect">
             <a:avLst/>
@@ -4269,8 +4269,8 @@
         </p:nvSpPr>
         <p:spPr>
           <a:xfrm>
-            <a:off x="7040880" y="1371600"/>
-            <a:ext cx="1600200" cy="411480"/>
+            <a:off x="7040880" y="1280160"/>
+            <a:ext cx="1600200" cy="365760"/>
           </a:xfrm>
           <a:prstGeom prst="rect">
             <a:avLst/>
@@ -4286,7 +4286,7 @@
               <a:buNone/>
             </a:pPr>
             <a:r>
-              <a:rPr lang="en-US" sz="1600" b="1" dirty="0">
+              <a:rPr lang="en-US" sz="1400" b="1" dirty="0">
                 <a:solidFill>
                   <a:srgbClr val="FFFFFF"/>
                 </a:solidFill>
@@ -4296,7 +4296,7 @@
               </a:rPr>
               <a:t>05</a:t>
             </a:r>
-            <a:endParaRPr lang="en-US" sz="1600" dirty="0"/>
+            <a:endParaRPr lang="en-US" sz="1400" dirty="0"/>
           </a:p>
         </p:txBody>
       </p:sp>
@@ -4308,8 +4308,8 @@
         </p:nvSpPr>
         <p:spPr>
           <a:xfrm>
-            <a:off x="7132320" y="1874520"/>
-            <a:ext cx="1417320" cy="320040"/>
+            <a:off x="7132320" y="1737360"/>
+            <a:ext cx="1417320" cy="274320"/>
           </a:xfrm>
           <a:prstGeom prst="rect">
             <a:avLst/>
@@ -4325,7 +4325,7 @@
               <a:buNone/>
             </a:pPr>
             <a:r>
-              <a:rPr lang="en-US" sz="1200" b="1" dirty="0">
+              <a:rPr lang="en-US" sz="1100" b="1" dirty="0">
                 <a:solidFill>
                   <a:srgbClr val="000000"/>
                 </a:solidFill>
@@ -4335,7 +4335,7 @@
               </a:rPr>
               <a:t>保护关系网</a:t>
             </a:r>
-            <a:endParaRPr lang="en-US" sz="1200" dirty="0"/>
+            <a:endParaRPr lang="en-US" sz="1100" dirty="0"/>
           </a:p>
         </p:txBody>
       </p:sp>
@@ -4347,8 +4347,8 @@
         </p:nvSpPr>
         <p:spPr>
           <a:xfrm>
-            <a:off x="7132320" y="2240280"/>
-            <a:ext cx="1417320" cy="457200"/>
+            <a:off x="7132320" y="2057400"/>
+            <a:ext cx="1417320" cy="411480"/>
           </a:xfrm>
           <a:prstGeom prst="rect">
             <a:avLst/>
@@ -4364,7 +4364,7 @@
               <a:buNone/>
             </a:pPr>
             <a:r>
-              <a:rPr lang="en-US" sz="1000" dirty="0">
+              <a:rPr lang="en-US" sz="900" dirty="0">
                 <a:solidFill>
                   <a:srgbClr val="666666"/>
                 </a:solidFill>
@@ -4374,7 +4374,7 @@
               </a:rPr>
               <a:t>不攻击刘伟佳，维护前下属关系</a:t>
             </a:r>
-            <a:endParaRPr lang="en-US" sz="1000" dirty="0"/>
+            <a:endParaRPr lang="en-US" sz="900" dirty="0"/>
           </a:p>
         </p:txBody>
       </p:sp>
@@ -4386,8 +4386,8 @@
         </p:nvSpPr>
         <p:spPr>
           <a:xfrm>
-            <a:off x="7132320" y="2788920"/>
-            <a:ext cx="1417320" cy="1645920"/>
+            <a:off x="7132320" y="2560320"/>
+            <a:ext cx="1417320" cy="1783080"/>
           </a:xfrm>
           <a:prstGeom prst="rect">
             <a:avLst/>
@@ -4409,8 +4409,8 @@
         </p:nvSpPr>
         <p:spPr>
           <a:xfrm>
-            <a:off x="7178040" y="2880360"/>
-            <a:ext cx="1325880" cy="1463040"/>
+            <a:off x="7178040" y="2651760"/>
+            <a:ext cx="1325880" cy="1645920"/>
           </a:xfrm>
           <a:prstGeom prst="rect">
             <a:avLst/>
@@ -4426,7 +4426,7 @@
               <a:buNone/>
             </a:pPr>
             <a:r>
-              <a:rPr lang="en-US" sz="900" dirty="0">
+              <a:rPr lang="en-US" sz="800" dirty="0">
                 <a:solidFill>
                   <a:srgbClr val="666666"/>
                 </a:solidFill>
@@ -4436,7 +4436,7 @@
               </a:rPr>
               <a:t>他和刘伟佳关系好，不提策略组配合问题</a:t>
             </a:r>
-            <a:endParaRPr lang="en-US" sz="900" dirty="0"/>
+            <a:endParaRPr lang="en-US" sz="800" dirty="0"/>
           </a:p>
         </p:txBody>
       </p:sp>
@@ -4448,8 +4448,8 @@
         </p:nvSpPr>
         <p:spPr>
           <a:xfrm>
-            <a:off x="457200" y="4709160"/>
-            <a:ext cx="8229600" cy="228600"/>
+            <a:off x="457200" y="4754880"/>
+            <a:ext cx="8229600" cy="18288"/>
           </a:xfrm>
           <a:prstGeom prst="rect">
             <a:avLst/>
@@ -4468,26 +4468,26 @@
         </p:nvSpPr>
         <p:spPr>
           <a:xfrm>
-            <a:off x="594360" y="4736592"/>
-            <a:ext cx="7955280" cy="182880"/>
-          </a:xfrm>
-          <a:prstGeom prst="rect">
-            <a:avLst/>
-          </a:prstGeom>
-          <a:noFill/>
-          <a:ln/>
-        </p:spPr>
-        <p:txBody>
-          <a:bodyPr wrap="square" rtlCol="0" anchor="ctr"/>
-          <a:lstStyle/>
-          <a:p>
-            <a:pPr algn="l" indent="0" marL="0">
-              <a:buNone/>
-            </a:pPr>
-            <a:r>
-              <a:rPr lang="en-US" sz="1000" b="1" dirty="0">
-                <a:solidFill>
-                  <a:srgbClr val="000000"/>
+            <a:off x="594360" y="4800600"/>
+            <a:ext cx="7955280" cy="164592"/>
+          </a:xfrm>
+          <a:prstGeom prst="rect">
+            <a:avLst/>
+          </a:prstGeom>
+          <a:noFill/>
+          <a:ln/>
+        </p:spPr>
+        <p:txBody>
+          <a:bodyPr wrap="square" rtlCol="0" anchor="ctr"/>
+          <a:lstStyle/>
+          <a:p>
+            <a:pPr algn="l" indent="0" marL="0">
+              <a:buNone/>
+            </a:pPr>
+            <a:r>
+              <a:rPr lang="en-US" sz="900" dirty="0">
+                <a:solidFill>
+                  <a:srgbClr val="666666"/>
                 </a:solidFill>
                 <a:latin typeface="Microsoft YaHei" pitchFamily="34" charset="0"/>
                 <a:ea typeface="Microsoft YaHei" pitchFamily="34" charset="-122"/>
@@ -4495,7 +4495,7 @@
               </a:rPr>
               <a:t>核心判断：这不是正常的工作方式，让人觉得动机或工作方式有问题</a:t>
             </a:r>
-            <a:endParaRPr lang="en-US" sz="1000" dirty="0"/>
+            <a:endParaRPr lang="en-US" sz="900" dirty="0"/>
           </a:p>
         </p:txBody>
       </p:sp>
@@ -4637,8 +4637,8 @@
         </p:nvSpPr>
         <p:spPr>
           <a:xfrm>
-            <a:off x="457200" y="1325880"/>
-            <a:ext cx="8229600" cy="457200"/>
+            <a:off x="457200" y="1280160"/>
+            <a:ext cx="8229600" cy="411480"/>
           </a:xfrm>
           <a:prstGeom prst="rect">
             <a:avLst/>
@@ -4657,8 +4657,47 @@
         </p:nvSpPr>
         <p:spPr>
           <a:xfrm>
-            <a:off x="594360" y="1325880"/>
-            <a:ext cx="7955280" cy="457200"/>
+            <a:off x="594360" y="1280160"/>
+            <a:ext cx="7955280" cy="411480"/>
+          </a:xfrm>
+          <a:prstGeom prst="rect">
+            <a:avLst/>
+          </a:prstGeom>
+          <a:noFill/>
+          <a:ln/>
+        </p:spPr>
+        <p:txBody>
+          <a:bodyPr wrap="square" rtlCol="0" anchor="ctr"/>
+          <a:lstStyle/>
+          <a:p>
+            <a:pPr algn="l" indent="0" marL="0">
+              <a:buNone/>
+            </a:pPr>
+            <a:r>
+              <a:rPr lang="en-US" sz="1100" b="1" dirty="0">
+                <a:solidFill>
+                  <a:srgbClr val="FFFFFF"/>
+                </a:solidFill>
+                <a:latin typeface="Microsoft YaHei" pitchFamily="34" charset="0"/>
+                <a:ea typeface="Microsoft YaHei" pitchFamily="34" charset="-122"/>
+                <a:cs typeface="Microsoft YaHei" pitchFamily="34" charset="-120"/>
+              </a:rPr>
+              <a:t>核心判断：表演型预警 + 转移视线 + 保护关系网 的三重组合</a:t>
+            </a:r>
+            <a:endParaRPr lang="en-US" sz="1100" dirty="0"/>
+          </a:p>
+        </p:txBody>
+      </p:sp>
+      <p:sp>
+        <p:nvSpPr>
+          <p:cNvPr id="6" name="Text 4"/>
+          <p:cNvSpPr/>
+          <p:nvPr/>
+        </p:nvSpPr>
+        <p:spPr>
+          <a:xfrm>
+            <a:off x="457200" y="1828800"/>
+            <a:ext cx="2011680" cy="201168"/>
           </a:xfrm>
           <a:prstGeom prst="rect">
             <a:avLst/>
@@ -4676,13 +4715,13 @@
             <a:r>
               <a:rPr lang="en-US" sz="1200" b="1" dirty="0">
                 <a:solidFill>
-                  <a:srgbClr val="FFFFFF"/>
-                </a:solidFill>
-                <a:latin typeface="Microsoft YaHei" pitchFamily="34" charset="0"/>
-                <a:ea typeface="Microsoft YaHei" pitchFamily="34" charset="-122"/>
-                <a:cs typeface="Microsoft YaHei" pitchFamily="34" charset="-120"/>
-              </a:rPr>
-              <a:t>核心判断：表演型预警 + 转移视线 + 保护关系网 的三重组合</a:t>
+                  <a:srgbClr val="000000"/>
+                </a:solidFill>
+                <a:latin typeface="Microsoft YaHei" pitchFamily="34" charset="0"/>
+                <a:ea typeface="Microsoft YaHei" pitchFamily="34" charset="-122"/>
+                <a:cs typeface="Microsoft YaHei" pitchFamily="34" charset="-120"/>
+              </a:rPr>
+              <a:t>表演型预警</a:t>
             </a:r>
             <a:endParaRPr lang="en-US" sz="1200" dirty="0"/>
           </a:p>
@@ -4690,30 +4729,69 @@
       </p:sp>
       <p:sp>
         <p:nvSpPr>
-          <p:cNvPr id="6" name="Text 4"/>
-          <p:cNvSpPr/>
-          <p:nvPr/>
-        </p:nvSpPr>
-        <p:spPr>
-          <a:xfrm>
-            <a:off x="457200" y="1920240"/>
-            <a:ext cx="2011680" cy="228600"/>
-          </a:xfrm>
-          <a:prstGeom prst="rect">
-            <a:avLst/>
-          </a:prstGeom>
-          <a:noFill/>
-          <a:ln/>
-        </p:spPr>
-        <p:txBody>
-          <a:bodyPr wrap="square" rtlCol="0" anchor="ctr"/>
-          <a:lstStyle/>
-          <a:p>
-            <a:pPr algn="l" indent="0" marL="0">
-              <a:buNone/>
-            </a:pPr>
-            <a:r>
-              <a:rPr lang="en-US" sz="1300" b="1" dirty="0">
+          <p:cNvPr id="7" name="Text 5"/>
+          <p:cNvSpPr/>
+          <p:nvPr/>
+        </p:nvSpPr>
+        <p:spPr>
+          <a:xfrm>
+            <a:off x="2468880" y="1828800"/>
+            <a:ext cx="1828800" cy="201168"/>
+          </a:xfrm>
+          <a:prstGeom prst="rect">
+            <a:avLst/>
+          </a:prstGeom>
+          <a:noFill/>
+          <a:ln/>
+        </p:spPr>
+        <p:txBody>
+          <a:bodyPr wrap="square" rtlCol="0" anchor="ctr"/>
+          <a:lstStyle/>
+          <a:p>
+            <a:pPr algn="l" indent="0" marL="0">
+              <a:buNone/>
+            </a:pPr>
+            <a:r>
+              <a:rPr lang="en-US" sz="1000" dirty="0">
+                <a:solidFill>
+                  <a:srgbClr val="D70015"/>
+                </a:solidFill>
+                <a:latin typeface="Microsoft YaHei" pitchFamily="34" charset="0"/>
+                <a:ea typeface="Microsoft YaHei" pitchFamily="34" charset="-122"/>
+                <a:cs typeface="Microsoft YaHei" pitchFamily="34" charset="-120"/>
+              </a:rPr>
+              <a:t>★★★★★</a:t>
+            </a:r>
+            <a:endParaRPr lang="en-US" sz="1000" dirty="0"/>
+          </a:p>
+        </p:txBody>
+      </p:sp>
+      <p:sp>
+        <p:nvSpPr>
+          <p:cNvPr id="8" name="Text 6"/>
+          <p:cNvSpPr/>
+          <p:nvPr/>
+        </p:nvSpPr>
+        <p:spPr>
+          <a:xfrm>
+            <a:off x="457200" y="2057400"/>
+            <a:ext cx="8138160" cy="146304"/>
+          </a:xfrm>
+          <a:prstGeom prst="rect">
+            <a:avLst/>
+          </a:prstGeom>
+          <a:noFill/>
+          <a:ln/>
+        </p:spPr>
+        <p:txBody>
+          <a:bodyPr wrap="square" rtlCol="0" anchor="ctr"/>
+          <a:lstStyle/>
+          <a:p>
+            <a:pPr algn="l" indent="0" marL="0">
+              <a:buNone/>
+            </a:pPr>
+            <a:r>
+              <a:rPr lang="en-US" sz="1000" dirty="0">
                 <a:solidFill>
                   <a:srgbClr val="000000"/>
                 </a:solidFill>
@@ -4721,38 +4799,116 @@
                 <a:ea typeface="Microsoft YaHei" pitchFamily="34" charset="-122"/>
                 <a:cs typeface="Microsoft YaHei" pitchFamily="34" charset="-120"/>
               </a:rPr>
-              <a:t>表演型预警</a:t>
-            </a:r>
-            <a:endParaRPr lang="en-US" sz="1300" dirty="0"/>
-          </a:p>
-        </p:txBody>
-      </p:sp>
-      <p:sp>
-        <p:nvSpPr>
-          <p:cNvPr id="7" name="Text 5"/>
-          <p:cNvSpPr/>
-          <p:nvPr/>
-        </p:nvSpPr>
-        <p:spPr>
-          <a:xfrm>
-            <a:off x="2468880" y="1920240"/>
-            <a:ext cx="1828800" cy="228600"/>
-          </a:xfrm>
-          <a:prstGeom prst="rect">
-            <a:avLst/>
-          </a:prstGeom>
-          <a:noFill/>
-          <a:ln/>
-        </p:spPr>
-        <p:txBody>
-          <a:bodyPr wrap="square" rtlCol="0" anchor="ctr"/>
-          <a:lstStyle/>
-          <a:p>
-            <a:pPr algn="l" indent="0" marL="0">
-              <a:buNone/>
-            </a:pPr>
-            <a:r>
-              <a:rPr lang="en-US" sz="1100" dirty="0">
+              <a:t>逻辑：通过"发现问题"来建立自己"关心业务"的人设</a:t>
+            </a:r>
+            <a:endParaRPr lang="en-US" sz="1000" dirty="0"/>
+          </a:p>
+        </p:txBody>
+      </p:sp>
+      <p:sp>
+        <p:nvSpPr>
+          <p:cNvPr id="9" name="Text 7"/>
+          <p:cNvSpPr/>
+          <p:nvPr/>
+        </p:nvSpPr>
+        <p:spPr>
+          <a:xfrm>
+            <a:off x="457200" y="2212848"/>
+            <a:ext cx="8138160" cy="100584"/>
+          </a:xfrm>
+          <a:prstGeom prst="rect">
+            <a:avLst/>
+          </a:prstGeom>
+          <a:noFill/>
+          <a:ln/>
+        </p:spPr>
+        <p:txBody>
+          <a:bodyPr wrap="square" rtlCol="0" anchor="ctr"/>
+          <a:lstStyle/>
+          <a:p>
+            <a:pPr algn="l" indent="0" marL="0">
+              <a:buNone/>
+            </a:pPr>
+            <a:r>
+              <a:rPr lang="en-US" sz="900" dirty="0">
+                <a:solidFill>
+                  <a:srgbClr val="666666"/>
+                </a:solidFill>
+                <a:latin typeface="Microsoft YaHei" pitchFamily="34" charset="0"/>
+                <a:ea typeface="Microsoft YaHei" pitchFamily="34" charset="-122"/>
+                <a:cs typeface="Microsoft YaHei" pitchFamily="34" charset="-120"/>
+              </a:rPr>
+              <a:t>  · 档案中模式 2"群内表演"：全程有观众意识</a:t>
+            </a:r>
+            <a:endParaRPr lang="en-US" sz="900" dirty="0"/>
+          </a:p>
+        </p:txBody>
+      </p:sp>
+      <p:sp>
+        <p:nvSpPr>
+          <p:cNvPr id="10" name="Text 8"/>
+          <p:cNvSpPr/>
+          <p:nvPr/>
+        </p:nvSpPr>
+        <p:spPr>
+          <a:xfrm>
+            <a:off x="457200" y="2331720"/>
+            <a:ext cx="8138160" cy="100584"/>
+          </a:xfrm>
+          <a:prstGeom prst="rect">
+            <a:avLst/>
+          </a:prstGeom>
+          <a:noFill/>
+          <a:ln/>
+        </p:spPr>
+        <p:txBody>
+          <a:bodyPr wrap="square" rtlCol="0" anchor="ctr"/>
+          <a:lstStyle/>
+          <a:p>
+            <a:pPr algn="l" indent="0" marL="0">
+              <a:buNone/>
+            </a:pPr>
+            <a:r>
+              <a:rPr lang="en-US" sz="900" dirty="0">
+                <a:solidFill>
+                  <a:srgbClr val="666666"/>
+                </a:solidFill>
+                <a:latin typeface="Microsoft YaHei" pitchFamily="34" charset="0"/>
+                <a:ea typeface="Microsoft YaHei" pitchFamily="34" charset="-122"/>
+                <a:cs typeface="Microsoft YaHei" pitchFamily="34" charset="-120"/>
+              </a:rPr>
+              <a:t>  · "疯狂地说自己在预警"= 强调"我在努力"</a:t>
+            </a:r>
+            <a:endParaRPr lang="en-US" sz="900" dirty="0"/>
+          </a:p>
+        </p:txBody>
+      </p:sp>
+      <p:sp>
+        <p:nvSpPr>
+          <p:cNvPr id="11" name="Text 9"/>
+          <p:cNvSpPr/>
+          <p:nvPr/>
+        </p:nvSpPr>
+        <p:spPr>
+          <a:xfrm>
+            <a:off x="457200" y="2487168"/>
+            <a:ext cx="8138160" cy="128016"/>
+          </a:xfrm>
+          <a:prstGeom prst="rect">
+            <a:avLst/>
+          </a:prstGeom>
+          <a:noFill/>
+          <a:ln/>
+        </p:spPr>
+        <p:txBody>
+          <a:bodyPr wrap="square" rtlCol="0" anchor="ctr"/>
+          <a:lstStyle/>
+          <a:p>
+            <a:pPr algn="l" indent="0" marL="0">
+              <a:buNone/>
+            </a:pPr>
+            <a:r>
+              <a:rPr lang="en-US" sz="900" b="1" dirty="0">
                 <a:solidFill>
                   <a:srgbClr val="D70015"/>
                 </a:solidFill>
@@ -4760,85 +4916,7 @@
                 <a:ea typeface="Microsoft YaHei" pitchFamily="34" charset="-122"/>
                 <a:cs typeface="Microsoft YaHei" pitchFamily="34" charset="-120"/>
               </a:rPr>
-              <a:t>★★★★★</a:t>
-            </a:r>
-            <a:endParaRPr lang="en-US" sz="1100" dirty="0"/>
-          </a:p>
-        </p:txBody>
-      </p:sp>
-      <p:sp>
-        <p:nvSpPr>
-          <p:cNvPr id="8" name="Text 6"/>
-          <p:cNvSpPr/>
-          <p:nvPr/>
-        </p:nvSpPr>
-        <p:spPr>
-          <a:xfrm>
-            <a:off x="457200" y="2176272"/>
-            <a:ext cx="8138160" cy="164592"/>
-          </a:xfrm>
-          <a:prstGeom prst="rect">
-            <a:avLst/>
-          </a:prstGeom>
-          <a:noFill/>
-          <a:ln/>
-        </p:spPr>
-        <p:txBody>
-          <a:bodyPr wrap="square" rtlCol="0" anchor="ctr"/>
-          <a:lstStyle/>
-          <a:p>
-            <a:pPr algn="l" indent="0" marL="0">
-              <a:buNone/>
-            </a:pPr>
-            <a:r>
-              <a:rPr lang="en-US" sz="1000" dirty="0">
-                <a:solidFill>
-                  <a:srgbClr val="000000"/>
-                </a:solidFill>
-                <a:latin typeface="Microsoft YaHei" pitchFamily="34" charset="0"/>
-                <a:ea typeface="Microsoft YaHei" pitchFamily="34" charset="-122"/>
-                <a:cs typeface="Microsoft YaHei" pitchFamily="34" charset="-120"/>
-              </a:rPr>
-              <a:t>逻辑：通过"发现问题"来建立自己"关心业务"的人设</a:t>
-            </a:r>
-            <a:endParaRPr lang="en-US" sz="1000" dirty="0"/>
-          </a:p>
-        </p:txBody>
-      </p:sp>
-      <p:sp>
-        <p:nvSpPr>
-          <p:cNvPr id="9" name="Text 7"/>
-          <p:cNvSpPr/>
-          <p:nvPr/>
-        </p:nvSpPr>
-        <p:spPr>
-          <a:xfrm>
-            <a:off x="457200" y="2340864"/>
-            <a:ext cx="8138160" cy="109728"/>
-          </a:xfrm>
-          <a:prstGeom prst="rect">
-            <a:avLst/>
-          </a:prstGeom>
-          <a:noFill/>
-          <a:ln/>
-        </p:spPr>
-        <p:txBody>
-          <a:bodyPr wrap="square" rtlCol="0" anchor="ctr"/>
-          <a:lstStyle/>
-          <a:p>
-            <a:pPr algn="l" indent="0" marL="0">
-              <a:buNone/>
-            </a:pPr>
-            <a:r>
-              <a:rPr lang="en-US" sz="900" dirty="0">
-                <a:solidFill>
-                  <a:srgbClr val="666666"/>
-                </a:solidFill>
-                <a:latin typeface="Microsoft YaHei" pitchFamily="34" charset="0"/>
-                <a:ea typeface="Microsoft YaHei" pitchFamily="34" charset="-122"/>
-                <a:cs typeface="Microsoft YaHei" pitchFamily="34" charset="-120"/>
-              </a:rPr>
-              <a:t>  · 档案中模式 2"群内表演"：全程有观众意识</a:t>
+              <a:t>收益：如果激励出问题=他预警有功；如果不出问题=他推动有功</a:t>
             </a:r>
             <a:endParaRPr lang="en-US" sz="900" dirty="0"/>
           </a:p>
@@ -4846,91 +4924,13 @@
       </p:sp>
       <p:sp>
         <p:nvSpPr>
-          <p:cNvPr id="10" name="Text 8"/>
-          <p:cNvSpPr/>
-          <p:nvPr/>
-        </p:nvSpPr>
-        <p:spPr>
-          <a:xfrm>
-            <a:off x="457200" y="2468880"/>
-            <a:ext cx="8138160" cy="109728"/>
-          </a:xfrm>
-          <a:prstGeom prst="rect">
-            <a:avLst/>
-          </a:prstGeom>
-          <a:noFill/>
-          <a:ln/>
-        </p:spPr>
-        <p:txBody>
-          <a:bodyPr wrap="square" rtlCol="0" anchor="ctr"/>
-          <a:lstStyle/>
-          <a:p>
-            <a:pPr algn="l" indent="0" marL="0">
-              <a:buNone/>
-            </a:pPr>
-            <a:r>
-              <a:rPr lang="en-US" sz="900" dirty="0">
-                <a:solidFill>
-                  <a:srgbClr val="666666"/>
-                </a:solidFill>
-                <a:latin typeface="Microsoft YaHei" pitchFamily="34" charset="0"/>
-                <a:ea typeface="Microsoft YaHei" pitchFamily="34" charset="-122"/>
-                <a:cs typeface="Microsoft YaHei" pitchFamily="34" charset="-120"/>
-              </a:rPr>
-              <a:t>  · "疯狂地说自己在预警"= 强调"我在努力"</a:t>
-            </a:r>
-            <a:endParaRPr lang="en-US" sz="900" dirty="0"/>
-          </a:p>
-        </p:txBody>
-      </p:sp>
-      <p:sp>
-        <p:nvSpPr>
-          <p:cNvPr id="11" name="Text 9"/>
-          <p:cNvSpPr/>
-          <p:nvPr/>
-        </p:nvSpPr>
-        <p:spPr>
-          <a:xfrm>
-            <a:off x="457200" y="2606040"/>
-            <a:ext cx="8138160" cy="137160"/>
-          </a:xfrm>
-          <a:prstGeom prst="rect">
-            <a:avLst/>
-          </a:prstGeom>
-          <a:noFill/>
-          <a:ln/>
-        </p:spPr>
-        <p:txBody>
-          <a:bodyPr wrap="square" rtlCol="0" anchor="ctr"/>
-          <a:lstStyle/>
-          <a:p>
-            <a:pPr algn="l" indent="0" marL="0">
-              <a:buNone/>
-            </a:pPr>
-            <a:r>
-              <a:rPr lang="en-US" sz="900" b="1" dirty="0">
-                <a:solidFill>
-                  <a:srgbClr val="D70015"/>
-                </a:solidFill>
-                <a:latin typeface="Microsoft YaHei" pitchFamily="34" charset="0"/>
-                <a:ea typeface="Microsoft YaHei" pitchFamily="34" charset="-122"/>
-                <a:cs typeface="Microsoft YaHei" pitchFamily="34" charset="-120"/>
-              </a:rPr>
-              <a:t>收益：如果激励出问题=他预警有功；如果不出问题=他推动有功</a:t>
-            </a:r>
-            <a:endParaRPr lang="en-US" sz="900" dirty="0"/>
-          </a:p>
-        </p:txBody>
-      </p:sp>
-      <p:sp>
-        <p:nvSpPr>
           <p:cNvPr id="12" name="Shape 10"/>
           <p:cNvSpPr/>
           <p:nvPr/>
         </p:nvSpPr>
         <p:spPr>
           <a:xfrm>
-            <a:off x="457200" y="2761488"/>
+            <a:off x="457200" y="2670048"/>
             <a:ext cx="8229600" cy="18288"/>
           </a:xfrm>
           <a:prstGeom prst="rect">
@@ -4951,23 +4951,23 @@
         <p:spPr>
           <a:xfrm>
             <a:off x="457200" y="2788920"/>
-            <a:ext cx="2011680" cy="228600"/>
-          </a:xfrm>
-          <a:prstGeom prst="rect">
-            <a:avLst/>
-          </a:prstGeom>
-          <a:noFill/>
-          <a:ln/>
-        </p:spPr>
-        <p:txBody>
-          <a:bodyPr wrap="square" rtlCol="0" anchor="ctr"/>
-          <a:lstStyle/>
-          <a:p>
-            <a:pPr algn="l" indent="0" marL="0">
-              <a:buNone/>
-            </a:pPr>
-            <a:r>
-              <a:rPr lang="en-US" sz="1300" b="1" dirty="0">
+            <a:ext cx="2011680" cy="201168"/>
+          </a:xfrm>
+          <a:prstGeom prst="rect">
+            <a:avLst/>
+          </a:prstGeom>
+          <a:noFill/>
+          <a:ln/>
+        </p:spPr>
+        <p:txBody>
+          <a:bodyPr wrap="square" rtlCol="0" anchor="ctr"/>
+          <a:lstStyle/>
+          <a:p>
+            <a:pPr algn="l" indent="0" marL="0">
+              <a:buNone/>
+            </a:pPr>
+            <a:r>
+              <a:rPr lang="en-US" sz="1200" b="1" dirty="0">
                 <a:solidFill>
                   <a:srgbClr val="000000"/>
                 </a:solidFill>
@@ -4977,7 +4977,7 @@
               </a:rPr>
               <a:t>转移视线</a:t>
             </a:r>
-            <a:endParaRPr lang="en-US" sz="1300" dirty="0"/>
+            <a:endParaRPr lang="en-US" sz="1200" dirty="0"/>
           </a:p>
         </p:txBody>
       </p:sp>
@@ -4990,23 +4990,23 @@
         <p:spPr>
           <a:xfrm>
             <a:off x="2468880" y="2788920"/>
-            <a:ext cx="1828800" cy="228600"/>
-          </a:xfrm>
-          <a:prstGeom prst="rect">
-            <a:avLst/>
-          </a:prstGeom>
-          <a:noFill/>
-          <a:ln/>
-        </p:spPr>
-        <p:txBody>
-          <a:bodyPr wrap="square" rtlCol="0" anchor="ctr"/>
-          <a:lstStyle/>
-          <a:p>
-            <a:pPr algn="l" indent="0" marL="0">
-              <a:buNone/>
-            </a:pPr>
-            <a:r>
-              <a:rPr lang="en-US" sz="1100" dirty="0">
+            <a:ext cx="1828800" cy="201168"/>
+          </a:xfrm>
+          <a:prstGeom prst="rect">
+            <a:avLst/>
+          </a:prstGeom>
+          <a:noFill/>
+          <a:ln/>
+        </p:spPr>
+        <p:txBody>
+          <a:bodyPr wrap="square" rtlCol="0" anchor="ctr"/>
+          <a:lstStyle/>
+          <a:p>
+            <a:pPr algn="l" indent="0" marL="0">
+              <a:buNone/>
+            </a:pPr>
+            <a:r>
+              <a:rPr lang="en-US" sz="1000" dirty="0">
                 <a:solidFill>
                   <a:srgbClr val="D70015"/>
                 </a:solidFill>
@@ -5016,7 +5016,7 @@
               </a:rPr>
               <a:t>★★★★★</a:t>
             </a:r>
-            <a:endParaRPr lang="en-US" sz="1100" dirty="0"/>
+            <a:endParaRPr lang="en-US" sz="1000" dirty="0"/>
           </a:p>
         </p:txBody>
       </p:sp>
@@ -5028,8 +5028,8 @@
         </p:nvSpPr>
         <p:spPr>
           <a:xfrm>
-            <a:off x="457200" y="3044952"/>
-            <a:ext cx="8138160" cy="164592"/>
+            <a:off x="457200" y="3017520"/>
+            <a:ext cx="8138160" cy="146304"/>
           </a:xfrm>
           <a:prstGeom prst="rect">
             <a:avLst/>
@@ -5067,8 +5067,8 @@
         </p:nvSpPr>
         <p:spPr>
           <a:xfrm>
-            <a:off x="457200" y="3209544"/>
-            <a:ext cx="8138160" cy="109728"/>
+            <a:off x="457200" y="3172968"/>
+            <a:ext cx="8138160" cy="100584"/>
           </a:xfrm>
           <a:prstGeom prst="rect">
             <a:avLst/>
@@ -5106,8 +5106,8 @@
         </p:nvSpPr>
         <p:spPr>
           <a:xfrm>
-            <a:off x="457200" y="3337560"/>
-            <a:ext cx="8138160" cy="109728"/>
+            <a:off x="457200" y="3291840"/>
+            <a:ext cx="8138160" cy="100584"/>
           </a:xfrm>
           <a:prstGeom prst="rect">
             <a:avLst/>
@@ -5145,8 +5145,8 @@
         </p:nvSpPr>
         <p:spPr>
           <a:xfrm>
-            <a:off x="457200" y="3474720"/>
-            <a:ext cx="8138160" cy="137160"/>
+            <a:off x="457200" y="3447288"/>
+            <a:ext cx="8138160" cy="128016"/>
           </a:xfrm>
           <a:prstGeom prst="rect">
             <a:avLst/>
@@ -5204,24 +5204,24 @@
         </p:nvSpPr>
         <p:spPr>
           <a:xfrm>
-            <a:off x="457200" y="3657600"/>
-            <a:ext cx="2011680" cy="228600"/>
-          </a:xfrm>
-          <a:prstGeom prst="rect">
-            <a:avLst/>
-          </a:prstGeom>
-          <a:noFill/>
-          <a:ln/>
-        </p:spPr>
-        <p:txBody>
-          <a:bodyPr wrap="square" rtlCol="0" anchor="ctr"/>
-          <a:lstStyle/>
-          <a:p>
-            <a:pPr algn="l" indent="0" marL="0">
-              <a:buNone/>
-            </a:pPr>
-            <a:r>
-              <a:rPr lang="en-US" sz="1300" b="1" dirty="0">
+            <a:off x="457200" y="3749040"/>
+            <a:ext cx="2011680" cy="201168"/>
+          </a:xfrm>
+          <a:prstGeom prst="rect">
+            <a:avLst/>
+          </a:prstGeom>
+          <a:noFill/>
+          <a:ln/>
+        </p:spPr>
+        <p:txBody>
+          <a:bodyPr wrap="square" rtlCol="0" anchor="ctr"/>
+          <a:lstStyle/>
+          <a:p>
+            <a:pPr algn="l" indent="0" marL="0">
+              <a:buNone/>
+            </a:pPr>
+            <a:r>
+              <a:rPr lang="en-US" sz="1200" b="1" dirty="0">
                 <a:solidFill>
                   <a:srgbClr val="000000"/>
                 </a:solidFill>
@@ -5231,7 +5231,7 @@
               </a:rPr>
               <a:t>保护关系网</a:t>
             </a:r>
-            <a:endParaRPr lang="en-US" sz="1300" dirty="0"/>
+            <a:endParaRPr lang="en-US" sz="1200" dirty="0"/>
           </a:p>
         </p:txBody>
       </p:sp>
@@ -5243,24 +5243,24 @@
         </p:nvSpPr>
         <p:spPr>
           <a:xfrm>
-            <a:off x="2468880" y="3657600"/>
-            <a:ext cx="1828800" cy="228600"/>
-          </a:xfrm>
-          <a:prstGeom prst="rect">
-            <a:avLst/>
-          </a:prstGeom>
-          <a:noFill/>
-          <a:ln/>
-        </p:spPr>
-        <p:txBody>
-          <a:bodyPr wrap="square" rtlCol="0" anchor="ctr"/>
-          <a:lstStyle/>
-          <a:p>
-            <a:pPr algn="l" indent="0" marL="0">
-              <a:buNone/>
-            </a:pPr>
-            <a:r>
-              <a:rPr lang="en-US" sz="1100" dirty="0">
+            <a:off x="2468880" y="3749040"/>
+            <a:ext cx="1828800" cy="201168"/>
+          </a:xfrm>
+          <a:prstGeom prst="rect">
+            <a:avLst/>
+          </a:prstGeom>
+          <a:noFill/>
+          <a:ln/>
+        </p:spPr>
+        <p:txBody>
+          <a:bodyPr wrap="square" rtlCol="0" anchor="ctr"/>
+          <a:lstStyle/>
+          <a:p>
+            <a:pPr algn="l" indent="0" marL="0">
+              <a:buNone/>
+            </a:pPr>
+            <a:r>
+              <a:rPr lang="en-US" sz="1000" dirty="0">
                 <a:solidFill>
                   <a:srgbClr val="D70015"/>
                 </a:solidFill>
@@ -5270,7 +5270,7 @@
               </a:rPr>
               <a:t>★★★★★</a:t>
             </a:r>
-            <a:endParaRPr lang="en-US" sz="1100" dirty="0"/>
+            <a:endParaRPr lang="en-US" sz="1000" dirty="0"/>
           </a:p>
         </p:txBody>
       </p:sp>
@@ -5282,8 +5282,8 @@
         </p:nvSpPr>
         <p:spPr>
           <a:xfrm>
-            <a:off x="457200" y="3913632"/>
-            <a:ext cx="8138160" cy="164592"/>
+            <a:off x="457200" y="3977640"/>
+            <a:ext cx="8138160" cy="146304"/>
           </a:xfrm>
           <a:prstGeom prst="rect">
             <a:avLst/>
@@ -5321,8 +5321,8 @@
         </p:nvSpPr>
         <p:spPr>
           <a:xfrm>
-            <a:off x="457200" y="4078224"/>
-            <a:ext cx="8138160" cy="109728"/>
+            <a:off x="457200" y="4133088"/>
+            <a:ext cx="8138160" cy="100584"/>
           </a:xfrm>
           <a:prstGeom prst="rect">
             <a:avLst/>
@@ -5360,8 +5360,8 @@
         </p:nvSpPr>
         <p:spPr>
           <a:xfrm>
-            <a:off x="457200" y="4206240"/>
-            <a:ext cx="8138160" cy="109728"/>
+            <a:off x="457200" y="4251960"/>
+            <a:ext cx="8138160" cy="100584"/>
           </a:xfrm>
           <a:prstGeom prst="rect">
             <a:avLst/>
@@ -5399,8 +5399,8 @@
         </p:nvSpPr>
         <p:spPr>
           <a:xfrm>
-            <a:off x="457200" y="4343400"/>
-            <a:ext cx="8138160" cy="137160"/>
+            <a:off x="457200" y="4407408"/>
+            <a:ext cx="8138160" cy="128016"/>
           </a:xfrm>
           <a:prstGeom prst="rect">
             <a:avLst/>
@@ -5627,7 +5627,7 @@
         </p:nvSpPr>
         <p:spPr>
           <a:xfrm>
-            <a:off x="457200" y="1371600"/>
+            <a:off x="457200" y="1280160"/>
             <a:ext cx="1600200" cy="320040"/>
           </a:xfrm>
           <a:prstGeom prst="rect">
@@ -5647,7 +5647,7 @@
         </p:nvSpPr>
         <p:spPr>
           <a:xfrm>
-            <a:off x="457200" y="1371600"/>
+            <a:off x="457200" y="1280160"/>
             <a:ext cx="1600200" cy="320040"/>
           </a:xfrm>
           <a:prstGeom prst="rect">
@@ -5686,8 +5686,8 @@
         </p:nvSpPr>
         <p:spPr>
           <a:xfrm>
-            <a:off x="548640" y="1783080"/>
-            <a:ext cx="1417320" cy="320040"/>
+            <a:off x="548640" y="1664208"/>
+            <a:ext cx="1417320" cy="274320"/>
           </a:xfrm>
           <a:prstGeom prst="rect">
             <a:avLst/>
@@ -5703,7 +5703,7 @@
               <a:buNone/>
             </a:pPr>
             <a:r>
-              <a:rPr lang="en-US" sz="1200" b="1" dirty="0">
+              <a:rPr lang="en-US" sz="1100" b="1" dirty="0">
                 <a:solidFill>
                   <a:srgbClr val="000000"/>
                 </a:solidFill>
@@ -5713,7 +5713,7 @@
               </a:rPr>
               <a:t>不接靶子</a:t>
             </a:r>
-            <a:endParaRPr lang="en-US" sz="1200" dirty="0"/>
+            <a:endParaRPr lang="en-US" sz="1100" dirty="0"/>
           </a:p>
         </p:txBody>
       </p:sp>
@@ -5725,8 +5725,8 @@
         </p:nvSpPr>
         <p:spPr>
           <a:xfrm>
-            <a:off x="548640" y="2148840"/>
-            <a:ext cx="1417320" cy="731520"/>
+            <a:off x="548640" y="1993392"/>
+            <a:ext cx="1417320" cy="822960"/>
           </a:xfrm>
           <a:prstGeom prst="rect">
             <a:avLst/>
@@ -5742,7 +5742,7 @@
               <a:buNone/>
             </a:pPr>
             <a:r>
-              <a:rPr lang="en-US" sz="1000" dirty="0">
+              <a:rPr lang="en-US" sz="900" dirty="0">
                 <a:solidFill>
                   <a:srgbClr val="666666"/>
                 </a:solidFill>
@@ -5752,7 +5752,7 @@
               </a:rPr>
               <a:t>不说"激励确实有问题"、"策略确实有问题"</a:t>
             </a:r>
-            <a:endParaRPr lang="en-US" sz="1000" dirty="0"/>
+            <a:endParaRPr lang="en-US" sz="900" dirty="0"/>
           </a:p>
         </p:txBody>
       </p:sp>
@@ -5764,7 +5764,7 @@
         </p:nvSpPr>
         <p:spPr>
           <a:xfrm>
-            <a:off x="2103120" y="1371600"/>
+            <a:off x="2103120" y="1280160"/>
             <a:ext cx="1600200" cy="320040"/>
           </a:xfrm>
           <a:prstGeom prst="rect">
@@ -5784,7 +5784,7 @@
         </p:nvSpPr>
         <p:spPr>
           <a:xfrm>
-            <a:off x="2103120" y="1371600"/>
+            <a:off x="2103120" y="1280160"/>
             <a:ext cx="1600200" cy="320040"/>
           </a:xfrm>
           <a:prstGeom prst="rect">
@@ -5823,8 +5823,8 @@
         </p:nvSpPr>
         <p:spPr>
           <a:xfrm>
-            <a:off x="2194560" y="1783080"/>
-            <a:ext cx="1417320" cy="320040"/>
+            <a:off x="2194560" y="1664208"/>
+            <a:ext cx="1417320" cy="274320"/>
           </a:xfrm>
           <a:prstGeom prst="rect">
             <a:avLst/>
@@ -5840,7 +5840,7 @@
               <a:buNone/>
             </a:pPr>
             <a:r>
-              <a:rPr lang="en-US" sz="1200" b="1" dirty="0">
+              <a:rPr lang="en-US" sz="1100" b="1" dirty="0">
                 <a:solidFill>
                   <a:srgbClr val="000000"/>
                 </a:solidFill>
@@ -5850,7 +5850,7 @@
               </a:rPr>
               <a:t>回归根本原因</a:t>
             </a:r>
-            <a:endParaRPr lang="en-US" sz="1200" dirty="0"/>
+            <a:endParaRPr lang="en-US" sz="1100" dirty="0"/>
           </a:p>
         </p:txBody>
       </p:sp>
@@ -5862,8 +5862,8 @@
         </p:nvSpPr>
         <p:spPr>
           <a:xfrm>
-            <a:off x="2194560" y="2148840"/>
-            <a:ext cx="1417320" cy="731520"/>
+            <a:off x="2194560" y="1993392"/>
+            <a:ext cx="1417320" cy="822960"/>
           </a:xfrm>
           <a:prstGeom prst="rect">
             <a:avLst/>
@@ -5879,7 +5879,7 @@
               <a:buNone/>
             </a:pPr>
             <a:r>
-              <a:rPr lang="en-US" sz="1000" dirty="0">
+              <a:rPr lang="en-US" sz="900" dirty="0">
                 <a:solidFill>
                   <a:srgbClr val="666666"/>
                 </a:solidFill>
@@ -5889,7 +5889,7 @@
               </a:rPr>
               <a:t>指出"交接期信息真空、数据中断"</a:t>
             </a:r>
-            <a:endParaRPr lang="en-US" sz="1000" dirty="0"/>
+            <a:endParaRPr lang="en-US" sz="900" dirty="0"/>
           </a:p>
         </p:txBody>
       </p:sp>
@@ -5901,7 +5901,7 @@
         </p:nvSpPr>
         <p:spPr>
           <a:xfrm>
-            <a:off x="3749040" y="1371600"/>
+            <a:off x="3749040" y="1280160"/>
             <a:ext cx="1600200" cy="320040"/>
           </a:xfrm>
           <a:prstGeom prst="rect">
@@ -5921,7 +5921,7 @@
         </p:nvSpPr>
         <p:spPr>
           <a:xfrm>
-            <a:off x="3749040" y="1371600"/>
+            <a:off x="3749040" y="1280160"/>
             <a:ext cx="1600200" cy="320040"/>
           </a:xfrm>
           <a:prstGeom prst="rect">
@@ -5960,8 +5960,8 @@
         </p:nvSpPr>
         <p:spPr>
           <a:xfrm>
-            <a:off x="3840480" y="1783080"/>
-            <a:ext cx="1417320" cy="320040"/>
+            <a:off x="3840480" y="1664208"/>
+            <a:ext cx="1417320" cy="274320"/>
           </a:xfrm>
           <a:prstGeom prst="rect">
             <a:avLst/>
@@ -5977,7 +5977,7 @@
               <a:buNone/>
             </a:pPr>
             <a:r>
-              <a:rPr lang="en-US" sz="1200" b="1" dirty="0">
+              <a:rPr lang="en-US" sz="1100" b="1" dirty="0">
                 <a:solidFill>
                   <a:srgbClr val="000000"/>
                 </a:solidFill>
@@ -5987,7 +5987,7 @@
               </a:rPr>
               <a:t>拒绝逼迫</a:t>
             </a:r>
-            <a:endParaRPr lang="en-US" sz="1200" dirty="0"/>
+            <a:endParaRPr lang="en-US" sz="1100" dirty="0"/>
           </a:p>
         </p:txBody>
       </p:sp>
@@ -5999,8 +5999,8 @@
         </p:nvSpPr>
         <p:spPr>
           <a:xfrm>
-            <a:off x="3840480" y="2148840"/>
-            <a:ext cx="1417320" cy="731520"/>
+            <a:off x="3840480" y="1993392"/>
+            <a:ext cx="1417320" cy="822960"/>
           </a:xfrm>
           <a:prstGeom prst="rect">
             <a:avLst/>
@@ -6016,7 +6016,7 @@
               <a:buNone/>
             </a:pPr>
             <a:r>
-              <a:rPr lang="en-US" sz="1000" dirty="0">
+              <a:rPr lang="en-US" sz="900" dirty="0">
                 <a:solidFill>
                   <a:srgbClr val="666666"/>
                 </a:solidFill>
@@ -6026,7 +6026,7 @@
               </a:rPr>
               <a:t>不被道德绑架逼迫表态</a:t>
             </a:r>
-            <a:endParaRPr lang="en-US" sz="1000" dirty="0"/>
+            <a:endParaRPr lang="en-US" sz="900" dirty="0"/>
           </a:p>
         </p:txBody>
       </p:sp>
@@ -6038,7 +6038,7 @@
         </p:nvSpPr>
         <p:spPr>
           <a:xfrm>
-            <a:off x="5394960" y="1371600"/>
+            <a:off x="5394960" y="1280160"/>
             <a:ext cx="1600200" cy="320040"/>
           </a:xfrm>
           <a:prstGeom prst="rect">
@@ -6058,7 +6058,7 @@
         </p:nvSpPr>
         <p:spPr>
           <a:xfrm>
-            <a:off x="5394960" y="1371600"/>
+            <a:off x="5394960" y="1280160"/>
             <a:ext cx="1600200" cy="320040"/>
           </a:xfrm>
           <a:prstGeom prst="rect">
@@ -6097,8 +6097,8 @@
         </p:nvSpPr>
         <p:spPr>
           <a:xfrm>
-            <a:off x="5486400" y="1783080"/>
-            <a:ext cx="1417320" cy="320040"/>
+            <a:off x="5486400" y="1664208"/>
+            <a:ext cx="1417320" cy="274320"/>
           </a:xfrm>
           <a:prstGeom prst="rect">
             <a:avLst/>
@@ -6114,7 +6114,7 @@
               <a:buNone/>
             </a:pPr>
             <a:r>
-              <a:rPr lang="en-US" sz="1200" b="1" dirty="0">
+              <a:rPr lang="en-US" sz="1100" b="1" dirty="0">
                 <a:solidFill>
                   <a:srgbClr val="000000"/>
                 </a:solidFill>
@@ -6124,7 +6124,7 @@
               </a:rPr>
               <a:t>保护安全感</a:t>
             </a:r>
-            <a:endParaRPr lang="en-US" sz="1200" dirty="0"/>
+            <a:endParaRPr lang="en-US" sz="1100" dirty="0"/>
           </a:p>
         </p:txBody>
       </p:sp>
@@ -6136,8 +6136,8 @@
         </p:nvSpPr>
         <p:spPr>
           <a:xfrm>
-            <a:off x="5486400" y="2148840"/>
-            <a:ext cx="1417320" cy="731520"/>
+            <a:off x="5486400" y="1993392"/>
+            <a:ext cx="1417320" cy="822960"/>
           </a:xfrm>
           <a:prstGeom prst="rect">
             <a:avLst/>
@@ -6153,7 +6153,7 @@
               <a:buNone/>
             </a:pPr>
             <a:r>
-              <a:rPr lang="en-US" sz="1000" dirty="0">
+              <a:rPr lang="en-US" sz="900" dirty="0">
                 <a:solidFill>
                   <a:srgbClr val="666666"/>
                 </a:solidFill>
@@ -6163,7 +6163,7 @@
               </a:rPr>
               <a:t>不在群里制造对立</a:t>
             </a:r>
-            <a:endParaRPr lang="en-US" sz="1000" dirty="0"/>
+            <a:endParaRPr lang="en-US" sz="900" dirty="0"/>
           </a:p>
         </p:txBody>
       </p:sp>
@@ -6175,7 +6175,7 @@
         </p:nvSpPr>
         <p:spPr>
           <a:xfrm>
-            <a:off x="7040880" y="1371600"/>
+            <a:off x="7040880" y="1280160"/>
             <a:ext cx="1600200" cy="320040"/>
           </a:xfrm>
           <a:prstGeom prst="rect">
@@ -6195,7 +6195,7 @@
         </p:nvSpPr>
         <p:spPr>
           <a:xfrm>
-            <a:off x="7040880" y="1371600"/>
+            <a:off x="7040880" y="1280160"/>
             <a:ext cx="1600200" cy="320040"/>
           </a:xfrm>
           <a:prstGeom prst="rect">
@@ -6234,8 +6234,8 @@
         </p:nvSpPr>
         <p:spPr>
           <a:xfrm>
-            <a:off x="7132320" y="1783080"/>
-            <a:ext cx="1417320" cy="320040"/>
+            <a:off x="7132320" y="1664208"/>
+            <a:ext cx="1417320" cy="274320"/>
           </a:xfrm>
           <a:prstGeom prst="rect">
             <a:avLst/>
@@ -6251,6 +6251,84 @@
               <a:buNone/>
             </a:pPr>
             <a:r>
+              <a:rPr lang="en-US" sz="1100" b="1" dirty="0">
+                <a:solidFill>
+                  <a:srgbClr val="000000"/>
+                </a:solidFill>
+                <a:latin typeface="Microsoft YaHei" pitchFamily="34" charset="0"/>
+                <a:ea typeface="Microsoft YaHei" pitchFamily="34" charset="-122"/>
+                <a:cs typeface="Microsoft YaHei" pitchFamily="34" charset="-120"/>
+              </a:rPr>
+              <a:t>用数据说话</a:t>
+            </a:r>
+            <a:endParaRPr lang="en-US" sz="1100" dirty="0"/>
+          </a:p>
+        </p:txBody>
+      </p:sp>
+      <p:sp>
+        <p:nvSpPr>
+          <p:cNvPr id="23" name="Text 21"/>
+          <p:cNvSpPr/>
+          <p:nvPr/>
+        </p:nvSpPr>
+        <p:spPr>
+          <a:xfrm>
+            <a:off x="7132320" y="1993392"/>
+            <a:ext cx="1417320" cy="822960"/>
+          </a:xfrm>
+          <a:prstGeom prst="rect">
+            <a:avLst/>
+          </a:prstGeom>
+          <a:noFill/>
+          <a:ln/>
+        </p:spPr>
+        <p:txBody>
+          <a:bodyPr wrap="square" rtlCol="0" anchor="ctr"/>
+          <a:lstStyle/>
+          <a:p>
+            <a:pPr algn="ctr" indent="0" marL="0">
+              <a:buNone/>
+            </a:pPr>
+            <a:r>
+              <a:rPr lang="en-US" sz="900" dirty="0">
+                <a:solidFill>
+                  <a:srgbClr val="666666"/>
+                </a:solidFill>
+                <a:latin typeface="Microsoft YaHei" pitchFamily="34" charset="0"/>
+                <a:ea typeface="Microsoft YaHei" pitchFamily="34" charset="-122"/>
+                <a:cs typeface="Microsoft YaHei" pitchFamily="34" charset="-120"/>
+              </a:rPr>
+              <a:t>真实数据对抗情绪化数字</a:t>
+            </a:r>
+            <a:endParaRPr lang="en-US" sz="900" dirty="0"/>
+          </a:p>
+        </p:txBody>
+      </p:sp>
+      <p:sp>
+        <p:nvSpPr>
+          <p:cNvPr id="24" name="Text 22"/>
+          <p:cNvSpPr/>
+          <p:nvPr/>
+        </p:nvSpPr>
+        <p:spPr>
+          <a:xfrm>
+            <a:off x="457200" y="3200400"/>
+            <a:ext cx="8229600" cy="228600"/>
+          </a:xfrm>
+          <a:prstGeom prst="rect">
+            <a:avLst/>
+          </a:prstGeom>
+          <a:noFill/>
+          <a:ln/>
+        </p:spPr>
+        <p:txBody>
+          <a:bodyPr wrap="square" rtlCol="0" anchor="ctr"/>
+          <a:lstStyle/>
+          <a:p>
+            <a:pPr algn="l" indent="0" marL="0">
+              <a:buNone/>
+            </a:pPr>
+            <a:r>
               <a:rPr lang="en-US" sz="1200" b="1" dirty="0">
                 <a:solidFill>
                   <a:srgbClr val="000000"/>
@@ -6259,7 +6337,7 @@
                 <a:ea typeface="Microsoft YaHei" pitchFamily="34" charset="-122"/>
                 <a:cs typeface="Microsoft YaHei" pitchFamily="34" charset="-120"/>
               </a:rPr>
-              <a:t>用数据说话</a:t>
+              <a:t>REACT 回应框架（群内@时使用）</a:t>
             </a:r>
             <a:endParaRPr lang="en-US" sz="1200" dirty="0"/>
           </a:p>
@@ -6267,30 +6345,69 @@
       </p:sp>
       <p:sp>
         <p:nvSpPr>
-          <p:cNvPr id="23" name="Text 21"/>
-          <p:cNvSpPr/>
-          <p:nvPr/>
-        </p:nvSpPr>
-        <p:spPr>
-          <a:xfrm>
-            <a:off x="7132320" y="2148840"/>
-            <a:ext cx="1417320" cy="731520"/>
-          </a:xfrm>
-          <a:prstGeom prst="rect">
-            <a:avLst/>
-          </a:prstGeom>
-          <a:noFill/>
-          <a:ln/>
-        </p:spPr>
-        <p:txBody>
-          <a:bodyPr wrap="square" rtlCol="0" anchor="ctr"/>
-          <a:lstStyle/>
-          <a:p>
-            <a:pPr algn="ctr" indent="0" marL="0">
-              <a:buNone/>
-            </a:pPr>
-            <a:r>
-              <a:rPr lang="en-US" sz="1000" dirty="0">
+          <p:cNvPr id="25" name="Text 23"/>
+          <p:cNvSpPr/>
+          <p:nvPr/>
+        </p:nvSpPr>
+        <p:spPr>
+          <a:xfrm>
+            <a:off x="457200" y="3456432"/>
+            <a:ext cx="2651760" cy="164592"/>
+          </a:xfrm>
+          <a:prstGeom prst="rect">
+            <a:avLst/>
+          </a:prstGeom>
+          <a:noFill/>
+          <a:ln/>
+        </p:spPr>
+        <p:txBody>
+          <a:bodyPr wrap="square" rtlCol="0" anchor="ctr"/>
+          <a:lstStyle/>
+          <a:p>
+            <a:pPr algn="l" indent="0" marL="0">
+              <a:buNone/>
+            </a:pPr>
+            <a:r>
+              <a:rPr lang="en-US" sz="900" b="1" dirty="0">
+                <a:solidFill>
+                  <a:srgbClr val="D70015"/>
+                </a:solidFill>
+                <a:latin typeface="Microsoft YaHei" pitchFamily="34" charset="0"/>
+                <a:ea typeface="Microsoft YaHei" pitchFamily="34" charset="-122"/>
+                <a:cs typeface="Microsoft YaHei" pitchFamily="34" charset="-120"/>
+              </a:rPr>
+              <a:t>R - Respond</a:t>
+            </a:r>
+            <a:endParaRPr lang="en-US" sz="900" dirty="0"/>
+          </a:p>
+        </p:txBody>
+      </p:sp>
+      <p:sp>
+        <p:nvSpPr>
+          <p:cNvPr id="26" name="Text 24"/>
+          <p:cNvSpPr/>
+          <p:nvPr/>
+        </p:nvSpPr>
+        <p:spPr>
+          <a:xfrm>
+            <a:off x="457200" y="3602736"/>
+            <a:ext cx="2651760" cy="365760"/>
+          </a:xfrm>
+          <a:prstGeom prst="rect">
+            <a:avLst/>
+          </a:prstGeom>
+          <a:noFill/>
+          <a:ln/>
+        </p:spPr>
+        <p:txBody>
+          <a:bodyPr wrap="square" rtlCol="0" anchor="ctr"/>
+          <a:lstStyle/>
+          <a:p>
+            <a:pPr algn="l" indent="0" marL="0">
+              <a:buNone/>
+            </a:pPr>
+            <a:r>
+              <a:rPr lang="en-US" sz="900" dirty="0">
                 <a:solidFill>
                   <a:srgbClr val="666666"/>
                 </a:solidFill>
@@ -6298,77 +6415,38 @@
                 <a:ea typeface="Microsoft YaHei" pitchFamily="34" charset="-122"/>
                 <a:cs typeface="Microsoft YaHei" pitchFamily="34" charset="-120"/>
               </a:rPr>
-              <a:t>真实数据对抗情绪化数字</a:t>
-            </a:r>
-            <a:endParaRPr lang="en-US" sz="1000" dirty="0"/>
-          </a:p>
-        </p:txBody>
-      </p:sp>
-      <p:sp>
-        <p:nvSpPr>
-          <p:cNvPr id="24" name="Text 22"/>
-          <p:cNvSpPr/>
-          <p:nvPr/>
-        </p:nvSpPr>
-        <p:spPr>
-          <a:xfrm>
-            <a:off x="457200" y="3200400"/>
-            <a:ext cx="8229600" cy="274320"/>
-          </a:xfrm>
-          <a:prstGeom prst="rect">
-            <a:avLst/>
-          </a:prstGeom>
-          <a:noFill/>
-          <a:ln/>
-        </p:spPr>
-        <p:txBody>
-          <a:bodyPr wrap="square" rtlCol="0" anchor="ctr"/>
-          <a:lstStyle/>
-          <a:p>
-            <a:pPr algn="l" indent="0" marL="0">
-              <a:buNone/>
-            </a:pPr>
-            <a:r>
-              <a:rPr lang="en-US" sz="1300" b="1" dirty="0">
-                <a:solidFill>
-                  <a:srgbClr val="000000"/>
-                </a:solidFill>
-                <a:latin typeface="Microsoft YaHei" pitchFamily="34" charset="0"/>
-                <a:ea typeface="Microsoft YaHei" pitchFamily="34" charset="-122"/>
-                <a:cs typeface="Microsoft YaHei" pitchFamily="34" charset="-120"/>
-              </a:rPr>
-              <a:t>REACT 回应框架（群内@时使用）</a:t>
-            </a:r>
-            <a:endParaRPr lang="en-US" sz="1300" dirty="0"/>
-          </a:p>
-        </p:txBody>
-      </p:sp>
-      <p:sp>
-        <p:nvSpPr>
-          <p:cNvPr id="25" name="Text 23"/>
-          <p:cNvSpPr/>
-          <p:nvPr/>
-        </p:nvSpPr>
-        <p:spPr>
-          <a:xfrm>
-            <a:off x="457200" y="3520440"/>
-            <a:ext cx="2651760" cy="182880"/>
-          </a:xfrm>
-          <a:prstGeom prst="rect">
-            <a:avLst/>
-          </a:prstGeom>
-          <a:noFill/>
-          <a:ln/>
-        </p:spPr>
-        <p:txBody>
-          <a:bodyPr wrap="square" rtlCol="0" anchor="ctr"/>
-          <a:lstStyle/>
-          <a:p>
-            <a:pPr algn="l" indent="0" marL="0">
-              <a:buNone/>
-            </a:pPr>
-            <a:r>
-              <a:rPr lang="en-US" sz="1000" b="1" dirty="0">
+              <a:t>"我理解你对激励问题的担忧"</a:t>
+            </a:r>
+            <a:endParaRPr lang="en-US" sz="900" dirty="0"/>
+          </a:p>
+        </p:txBody>
+      </p:sp>
+      <p:sp>
+        <p:nvSpPr>
+          <p:cNvPr id="27" name="Text 25"/>
+          <p:cNvSpPr/>
+          <p:nvPr/>
+        </p:nvSpPr>
+        <p:spPr>
+          <a:xfrm>
+            <a:off x="3200400" y="3456432"/>
+            <a:ext cx="2651760" cy="164592"/>
+          </a:xfrm>
+          <a:prstGeom prst="rect">
+            <a:avLst/>
+          </a:prstGeom>
+          <a:noFill/>
+          <a:ln/>
+        </p:spPr>
+        <p:txBody>
+          <a:bodyPr wrap="square" rtlCol="0" anchor="ctr"/>
+          <a:lstStyle/>
+          <a:p>
+            <a:pPr algn="l" indent="0" marL="0">
+              <a:buNone/>
+            </a:pPr>
+            <a:r>
+              <a:rPr lang="en-US" sz="900" b="1" dirty="0">
                 <a:solidFill>
                   <a:srgbClr val="D70015"/>
                 </a:solidFill>
@@ -6376,38 +6454,38 @@
                 <a:ea typeface="Microsoft YaHei" pitchFamily="34" charset="-122"/>
                 <a:cs typeface="Microsoft YaHei" pitchFamily="34" charset="-120"/>
               </a:rPr>
-              <a:t>R - Respond</a:t>
-            </a:r>
-            <a:endParaRPr lang="en-US" sz="1000" dirty="0"/>
-          </a:p>
-        </p:txBody>
-      </p:sp>
-      <p:sp>
-        <p:nvSpPr>
-          <p:cNvPr id="26" name="Text 24"/>
-          <p:cNvSpPr/>
-          <p:nvPr/>
-        </p:nvSpPr>
-        <p:spPr>
-          <a:xfrm>
-            <a:off x="457200" y="3685032"/>
-            <a:ext cx="2651760" cy="411480"/>
-          </a:xfrm>
-          <a:prstGeom prst="rect">
-            <a:avLst/>
-          </a:prstGeom>
-          <a:noFill/>
-          <a:ln/>
-        </p:spPr>
-        <p:txBody>
-          <a:bodyPr wrap="square" rtlCol="0" anchor="ctr"/>
-          <a:lstStyle/>
-          <a:p>
-            <a:pPr algn="l" indent="0" marL="0">
-              <a:buNone/>
-            </a:pPr>
-            <a:r>
-              <a:rPr lang="en-US" sz="1000" dirty="0">
+              <a:t>E - Explain</a:t>
+            </a:r>
+            <a:endParaRPr lang="en-US" sz="900" dirty="0"/>
+          </a:p>
+        </p:txBody>
+      </p:sp>
+      <p:sp>
+        <p:nvSpPr>
+          <p:cNvPr id="28" name="Text 26"/>
+          <p:cNvSpPr/>
+          <p:nvPr/>
+        </p:nvSpPr>
+        <p:spPr>
+          <a:xfrm>
+            <a:off x="3200400" y="3602736"/>
+            <a:ext cx="2651760" cy="365760"/>
+          </a:xfrm>
+          <a:prstGeom prst="rect">
+            <a:avLst/>
+          </a:prstGeom>
+          <a:noFill/>
+          <a:ln/>
+        </p:spPr>
+        <p:txBody>
+          <a:bodyPr wrap="square" rtlCol="0" anchor="ctr"/>
+          <a:lstStyle/>
+          <a:p>
+            <a:pPr algn="l" indent="0" marL="0">
+              <a:buNone/>
+            </a:pPr>
+            <a:r>
+              <a:rPr lang="en-US" sz="900" dirty="0">
                 <a:solidFill>
                   <a:srgbClr val="666666"/>
                 </a:solidFill>
@@ -6415,38 +6493,38 @@
                 <a:ea typeface="Microsoft YaHei" pitchFamily="34" charset="-122"/>
                 <a:cs typeface="Microsoft YaHei" pitchFamily="34" charset="-120"/>
               </a:rPr>
-              <a:t>"我理解你对激励问题的担忧"</a:t>
-            </a:r>
-            <a:endParaRPr lang="en-US" sz="1000" dirty="0"/>
-          </a:p>
-        </p:txBody>
-      </p:sp>
-      <p:sp>
-        <p:nvSpPr>
-          <p:cNvPr id="27" name="Text 25"/>
-          <p:cNvSpPr/>
-          <p:nvPr/>
-        </p:nvSpPr>
-        <p:spPr>
-          <a:xfrm>
-            <a:off x="3200400" y="3520440"/>
-            <a:ext cx="2651760" cy="182880"/>
-          </a:xfrm>
-          <a:prstGeom prst="rect">
-            <a:avLst/>
-          </a:prstGeom>
-          <a:noFill/>
-          <a:ln/>
-        </p:spPr>
-        <p:txBody>
-          <a:bodyPr wrap="square" rtlCol="0" anchor="ctr"/>
-          <a:lstStyle/>
-          <a:p>
-            <a:pPr algn="l" indent="0" marL="0">
-              <a:buNone/>
-            </a:pPr>
-            <a:r>
-              <a:rPr lang="en-US" sz="1000" b="1" dirty="0">
+              <a:t>"真正的问题是交接期信息真空、数据中断，不是拿不到钱"</a:t>
+            </a:r>
+            <a:endParaRPr lang="en-US" sz="900" dirty="0"/>
+          </a:p>
+        </p:txBody>
+      </p:sp>
+      <p:sp>
+        <p:nvSpPr>
+          <p:cNvPr id="29" name="Text 27"/>
+          <p:cNvSpPr/>
+          <p:nvPr/>
+        </p:nvSpPr>
+        <p:spPr>
+          <a:xfrm>
+            <a:off x="5943600" y="3456432"/>
+            <a:ext cx="2651760" cy="164592"/>
+          </a:xfrm>
+          <a:prstGeom prst="rect">
+            <a:avLst/>
+          </a:prstGeom>
+          <a:noFill/>
+          <a:ln/>
+        </p:spPr>
+        <p:txBody>
+          <a:bodyPr wrap="square" rtlCol="0" anchor="ctr"/>
+          <a:lstStyle/>
+          <a:p>
+            <a:pPr algn="l" indent="0" marL="0">
+              <a:buNone/>
+            </a:pPr>
+            <a:r>
+              <a:rPr lang="en-US" sz="900" b="1" dirty="0">
                 <a:solidFill>
                   <a:srgbClr val="D70015"/>
                 </a:solidFill>
@@ -6454,38 +6532,38 @@
                 <a:ea typeface="Microsoft YaHei" pitchFamily="34" charset="-122"/>
                 <a:cs typeface="Microsoft YaHei" pitchFamily="34" charset="-120"/>
               </a:rPr>
-              <a:t>E - Explain</a:t>
-            </a:r>
-            <a:endParaRPr lang="en-US" sz="1000" dirty="0"/>
-          </a:p>
-        </p:txBody>
-      </p:sp>
-      <p:sp>
-        <p:nvSpPr>
-          <p:cNvPr id="28" name="Text 26"/>
-          <p:cNvSpPr/>
-          <p:nvPr/>
-        </p:nvSpPr>
-        <p:spPr>
-          <a:xfrm>
-            <a:off x="3200400" y="3685032"/>
-            <a:ext cx="2651760" cy="411480"/>
-          </a:xfrm>
-          <a:prstGeom prst="rect">
-            <a:avLst/>
-          </a:prstGeom>
-          <a:noFill/>
-          <a:ln/>
-        </p:spPr>
-        <p:txBody>
-          <a:bodyPr wrap="square" rtlCol="0" anchor="ctr"/>
-          <a:lstStyle/>
-          <a:p>
-            <a:pPr algn="l" indent="0" marL="0">
-              <a:buNone/>
-            </a:pPr>
-            <a:r>
-              <a:rPr lang="en-US" sz="1000" dirty="0">
+              <a:t>A - Action</a:t>
+            </a:r>
+            <a:endParaRPr lang="en-US" sz="900" dirty="0"/>
+          </a:p>
+        </p:txBody>
+      </p:sp>
+      <p:sp>
+        <p:nvSpPr>
+          <p:cNvPr id="30" name="Text 28"/>
+          <p:cNvSpPr/>
+          <p:nvPr/>
+        </p:nvSpPr>
+        <p:spPr>
+          <a:xfrm>
+            <a:off x="5943600" y="3602736"/>
+            <a:ext cx="2651760" cy="365760"/>
+          </a:xfrm>
+          <a:prstGeom prst="rect">
+            <a:avLst/>
+          </a:prstGeom>
+          <a:noFill/>
+          <a:ln/>
+        </p:spPr>
+        <p:txBody>
+          <a:bodyPr wrap="square" rtlCol="0" anchor="ctr"/>
+          <a:lstStyle/>
+          <a:p>
+            <a:pPr algn="l" indent="0" marL="0">
+              <a:buNone/>
+            </a:pPr>
+            <a:r>
+              <a:rPr lang="en-US" sz="900" dirty="0">
                 <a:solidFill>
                   <a:srgbClr val="666666"/>
                 </a:solidFill>
@@ -6493,38 +6571,38 @@
                 <a:ea typeface="Microsoft YaHei" pitchFamily="34" charset="-122"/>
                 <a:cs typeface="Microsoft YaHei" pitchFamily="34" charset="-120"/>
               </a:rPr>
-              <a:t>"真正的问题是交接期信息真空、数据中断，不是拿不到钱"</a:t>
-            </a:r>
-            <a:endParaRPr lang="en-US" sz="1000" dirty="0"/>
-          </a:p>
-        </p:txBody>
-      </p:sp>
-      <p:sp>
-        <p:nvSpPr>
-          <p:cNvPr id="29" name="Text 27"/>
-          <p:cNvSpPr/>
-          <p:nvPr/>
-        </p:nvSpPr>
-        <p:spPr>
-          <a:xfrm>
-            <a:off x="5943600" y="3520440"/>
-            <a:ext cx="2651760" cy="182880"/>
-          </a:xfrm>
-          <a:prstGeom prst="rect">
-            <a:avLst/>
-          </a:prstGeom>
-          <a:noFill/>
-          <a:ln/>
-        </p:spPr>
-        <p:txBody>
-          <a:bodyPr wrap="square" rtlCol="0" anchor="ctr"/>
-          <a:lstStyle/>
-          <a:p>
-            <a:pPr algn="l" indent="0" marL="0">
-              <a:buNone/>
-            </a:pPr>
-            <a:r>
-              <a:rPr lang="en-US" sz="1000" b="1" dirty="0">
+              <a:t>"我这边已经和头部供应商沟通过，建议恢复数据同步机制"</a:t>
+            </a:r>
+            <a:endParaRPr lang="en-US" sz="900" dirty="0"/>
+          </a:p>
+        </p:txBody>
+      </p:sp>
+      <p:sp>
+        <p:nvSpPr>
+          <p:cNvPr id="31" name="Text 29"/>
+          <p:cNvSpPr/>
+          <p:nvPr/>
+        </p:nvSpPr>
+        <p:spPr>
+          <a:xfrm>
+            <a:off x="457200" y="4050792"/>
+            <a:ext cx="2651760" cy="164592"/>
+          </a:xfrm>
+          <a:prstGeom prst="rect">
+            <a:avLst/>
+          </a:prstGeom>
+          <a:noFill/>
+          <a:ln/>
+        </p:spPr>
+        <p:txBody>
+          <a:bodyPr wrap="square" rtlCol="0" anchor="ctr"/>
+          <a:lstStyle/>
+          <a:p>
+            <a:pPr algn="l" indent="0" marL="0">
+              <a:buNone/>
+            </a:pPr>
+            <a:r>
+              <a:rPr lang="en-US" sz="900" b="1" dirty="0">
                 <a:solidFill>
                   <a:srgbClr val="D70015"/>
                 </a:solidFill>
@@ -6532,38 +6610,38 @@
                 <a:ea typeface="Microsoft YaHei" pitchFamily="34" charset="-122"/>
                 <a:cs typeface="Microsoft YaHei" pitchFamily="34" charset="-120"/>
               </a:rPr>
-              <a:t>A - Action</a:t>
-            </a:r>
-            <a:endParaRPr lang="en-US" sz="1000" dirty="0"/>
-          </a:p>
-        </p:txBody>
-      </p:sp>
-      <p:sp>
-        <p:nvSpPr>
-          <p:cNvPr id="30" name="Text 28"/>
-          <p:cNvSpPr/>
-          <p:nvPr/>
-        </p:nvSpPr>
-        <p:spPr>
-          <a:xfrm>
-            <a:off x="5943600" y="3685032"/>
-            <a:ext cx="2651760" cy="411480"/>
-          </a:xfrm>
-          <a:prstGeom prst="rect">
-            <a:avLst/>
-          </a:prstGeom>
-          <a:noFill/>
-          <a:ln/>
-        </p:spPr>
-        <p:txBody>
-          <a:bodyPr wrap="square" rtlCol="0" anchor="ctr"/>
-          <a:lstStyle/>
-          <a:p>
-            <a:pPr algn="l" indent="0" marL="0">
-              <a:buNone/>
-            </a:pPr>
-            <a:r>
-              <a:rPr lang="en-US" sz="1000" dirty="0">
+              <a:t>C - Constraint</a:t>
+            </a:r>
+            <a:endParaRPr lang="en-US" sz="900" dirty="0"/>
+          </a:p>
+        </p:txBody>
+      </p:sp>
+      <p:sp>
+        <p:nvSpPr>
+          <p:cNvPr id="32" name="Text 30"/>
+          <p:cNvSpPr/>
+          <p:nvPr/>
+        </p:nvSpPr>
+        <p:spPr>
+          <a:xfrm>
+            <a:off x="457200" y="4197096"/>
+            <a:ext cx="2651760" cy="365760"/>
+          </a:xfrm>
+          <a:prstGeom prst="rect">
+            <a:avLst/>
+          </a:prstGeom>
+          <a:noFill/>
+          <a:ln/>
+        </p:spPr>
+        <p:txBody>
+          <a:bodyPr wrap="square" rtlCol="0" anchor="ctr"/>
+          <a:lstStyle/>
+          <a:p>
+            <a:pPr algn="l" indent="0" marL="0">
+              <a:buNone/>
+            </a:pPr>
+            <a:r>
+              <a:rPr lang="en-US" sz="900" dirty="0">
                 <a:solidFill>
                   <a:srgbClr val="666666"/>
                 </a:solidFill>
@@ -6571,38 +6649,38 @@
                 <a:ea typeface="Microsoft YaHei" pitchFamily="34" charset="-122"/>
                 <a:cs typeface="Microsoft YaHei" pitchFamily="34" charset="-120"/>
               </a:rPr>
-              <a:t>"我这边已经和头部供应商沟通过，建议恢复数据同步机制"</a:t>
-            </a:r>
-            <a:endParaRPr lang="en-US" sz="1000" dirty="0"/>
-          </a:p>
-        </p:txBody>
-      </p:sp>
-      <p:sp>
-        <p:nvSpPr>
-          <p:cNvPr id="31" name="Text 29"/>
-          <p:cNvSpPr/>
-          <p:nvPr/>
-        </p:nvSpPr>
-        <p:spPr>
-          <a:xfrm>
-            <a:off x="457200" y="4206240"/>
-            <a:ext cx="2651760" cy="182880"/>
-          </a:xfrm>
-          <a:prstGeom prst="rect">
-            <a:avLst/>
-          </a:prstGeom>
-          <a:noFill/>
-          <a:ln/>
-        </p:spPr>
-        <p:txBody>
-          <a:bodyPr wrap="square" rtlCol="0" anchor="ctr"/>
-          <a:lstStyle/>
-          <a:p>
-            <a:pPr algn="l" indent="0" marL="0">
-              <a:buNone/>
-            </a:pPr>
-            <a:r>
-              <a:rPr lang="en-US" sz="1000" b="1" dirty="0">
+              <a:t>"激励方案制定在策略组，我这边负责供应商沟通"</a:t>
+            </a:r>
+            <a:endParaRPr lang="en-US" sz="900" dirty="0"/>
+          </a:p>
+        </p:txBody>
+      </p:sp>
+      <p:sp>
+        <p:nvSpPr>
+          <p:cNvPr id="33" name="Text 31"/>
+          <p:cNvSpPr/>
+          <p:nvPr/>
+        </p:nvSpPr>
+        <p:spPr>
+          <a:xfrm>
+            <a:off x="3200400" y="4050792"/>
+            <a:ext cx="2651760" cy="164592"/>
+          </a:xfrm>
+          <a:prstGeom prst="rect">
+            <a:avLst/>
+          </a:prstGeom>
+          <a:noFill/>
+          <a:ln/>
+        </p:spPr>
+        <p:txBody>
+          <a:bodyPr wrap="square" rtlCol="0" anchor="ctr"/>
+          <a:lstStyle/>
+          <a:p>
+            <a:pPr algn="l" indent="0" marL="0">
+              <a:buNone/>
+            </a:pPr>
+            <a:r>
+              <a:rPr lang="en-US" sz="900" b="1" dirty="0">
                 <a:solidFill>
                   <a:srgbClr val="D70015"/>
                 </a:solidFill>
@@ -6610,38 +6688,38 @@
                 <a:ea typeface="Microsoft YaHei" pitchFamily="34" charset="-122"/>
                 <a:cs typeface="Microsoft YaHei" pitchFamily="34" charset="-120"/>
               </a:rPr>
-              <a:t>C - Constraint</a:t>
-            </a:r>
-            <a:endParaRPr lang="en-US" sz="1000" dirty="0"/>
-          </a:p>
-        </p:txBody>
-      </p:sp>
-      <p:sp>
-        <p:nvSpPr>
-          <p:cNvPr id="32" name="Text 30"/>
-          <p:cNvSpPr/>
-          <p:nvPr/>
-        </p:nvSpPr>
-        <p:spPr>
-          <a:xfrm>
-            <a:off x="457200" y="4370832"/>
-            <a:ext cx="2651760" cy="411480"/>
-          </a:xfrm>
-          <a:prstGeom prst="rect">
-            <a:avLst/>
-          </a:prstGeom>
-          <a:noFill/>
-          <a:ln/>
-        </p:spPr>
-        <p:txBody>
-          <a:bodyPr wrap="square" rtlCol="0" anchor="ctr"/>
-          <a:lstStyle/>
-          <a:p>
-            <a:pPr algn="l" indent="0" marL="0">
-              <a:buNone/>
-            </a:pPr>
-            <a:r>
-              <a:rPr lang="en-US" sz="1000" dirty="0">
+              <a:t>T - Target</a:t>
+            </a:r>
+            <a:endParaRPr lang="en-US" sz="900" dirty="0"/>
+          </a:p>
+        </p:txBody>
+      </p:sp>
+      <p:sp>
+        <p:nvSpPr>
+          <p:cNvPr id="34" name="Text 32"/>
+          <p:cNvSpPr/>
+          <p:nvPr/>
+        </p:nvSpPr>
+        <p:spPr>
+          <a:xfrm>
+            <a:off x="3200400" y="4197096"/>
+            <a:ext cx="2651760" cy="365760"/>
+          </a:xfrm>
+          <a:prstGeom prst="rect">
+            <a:avLst/>
+          </a:prstGeom>
+          <a:noFill/>
+          <a:ln/>
+        </p:spPr>
+        <p:txBody>
+          <a:bodyPr wrap="square" rtlCol="0" anchor="ctr"/>
+          <a:lstStyle/>
+          <a:p>
+            <a:pPr algn="l" indent="0" marL="0">
+              <a:buNone/>
+            </a:pPr>
+            <a:r>
+              <a:rPr lang="en-US" sz="900" dirty="0">
                 <a:solidFill>
                   <a:srgbClr val="666666"/>
                 </a:solidFill>
@@ -6649,87 +6727,9 @@
                 <a:ea typeface="Microsoft YaHei" pitchFamily="34" charset="-122"/>
                 <a:cs typeface="Microsoft YaHei" pitchFamily="34" charset="-120"/>
               </a:rPr>
-              <a:t>"激励方案制定在策略组，我这边负责供应商沟通"</a:t>
-            </a:r>
-            <a:endParaRPr lang="en-US" sz="1000" dirty="0"/>
-          </a:p>
-        </p:txBody>
-      </p:sp>
-      <p:sp>
-        <p:nvSpPr>
-          <p:cNvPr id="33" name="Text 31"/>
-          <p:cNvSpPr/>
-          <p:nvPr/>
-        </p:nvSpPr>
-        <p:spPr>
-          <a:xfrm>
-            <a:off x="3200400" y="4206240"/>
-            <a:ext cx="2651760" cy="182880"/>
-          </a:xfrm>
-          <a:prstGeom prst="rect">
-            <a:avLst/>
-          </a:prstGeom>
-          <a:noFill/>
-          <a:ln/>
-        </p:spPr>
-        <p:txBody>
-          <a:bodyPr wrap="square" rtlCol="0" anchor="ctr"/>
-          <a:lstStyle/>
-          <a:p>
-            <a:pPr algn="l" indent="0" marL="0">
-              <a:buNone/>
-            </a:pPr>
-            <a:r>
-              <a:rPr lang="en-US" sz="1000" b="1" dirty="0">
-                <a:solidFill>
-                  <a:srgbClr val="D70015"/>
-                </a:solidFill>
-                <a:latin typeface="Microsoft YaHei" pitchFamily="34" charset="0"/>
-                <a:ea typeface="Microsoft YaHei" pitchFamily="34" charset="-122"/>
-                <a:cs typeface="Microsoft YaHei" pitchFamily="34" charset="-120"/>
-              </a:rPr>
-              <a:t>T - Target</a:t>
-            </a:r>
-            <a:endParaRPr lang="en-US" sz="1000" dirty="0"/>
-          </a:p>
-        </p:txBody>
-      </p:sp>
-      <p:sp>
-        <p:nvSpPr>
-          <p:cNvPr id="34" name="Text 32"/>
-          <p:cNvSpPr/>
-          <p:nvPr/>
-        </p:nvSpPr>
-        <p:spPr>
-          <a:xfrm>
-            <a:off x="3200400" y="4370832"/>
-            <a:ext cx="2651760" cy="411480"/>
-          </a:xfrm>
-          <a:prstGeom prst="rect">
-            <a:avLst/>
-          </a:prstGeom>
-          <a:noFill/>
-          <a:ln/>
-        </p:spPr>
-        <p:txBody>
-          <a:bodyPr wrap="square" rtlCol="0" anchor="ctr"/>
-          <a:lstStyle/>
-          <a:p>
-            <a:pPr algn="l" indent="0" marL="0">
-              <a:buNone/>
-            </a:pPr>
-            <a:r>
-              <a:rPr lang="en-US" sz="1000" dirty="0">
-                <a:solidFill>
-                  <a:srgbClr val="666666"/>
-                </a:solidFill>
-                <a:latin typeface="Microsoft YaHei" pitchFamily="34" charset="0"/>
-                <a:ea typeface="Microsoft YaHei" pitchFamily="34" charset="-122"/>
-                <a:cs typeface="Microsoft YaHei" pitchFamily="34" charset="-120"/>
-              </a:rPr>
               <a:t>"建议你们私下对齐交接期责任划分，恢复数据同步"</a:t>
             </a:r>
-            <a:endParaRPr lang="en-US" sz="1000" dirty="0"/>
+            <a:endParaRPr lang="en-US" sz="900" dirty="0"/>
           </a:p>
         </p:txBody>
       </p:sp>
@@ -6871,24 +6871,24 @@
         </p:nvSpPr>
         <p:spPr>
           <a:xfrm>
-            <a:off x="457200" y="1371600"/>
-            <a:ext cx="3840480" cy="320040"/>
-          </a:xfrm>
-          <a:prstGeom prst="rect">
-            <a:avLst/>
-          </a:prstGeom>
-          <a:noFill/>
-          <a:ln/>
-        </p:spPr>
-        <p:txBody>
-          <a:bodyPr wrap="square" rtlCol="0" anchor="ctr"/>
-          <a:lstStyle/>
-          <a:p>
-            <a:pPr algn="l" indent="0" marL="0">
-              <a:buNone/>
-            </a:pPr>
-            <a:r>
-              <a:rPr lang="en-US" sz="1400" b="1" dirty="0">
+            <a:off x="457200" y="1280160"/>
+            <a:ext cx="3840480" cy="274320"/>
+          </a:xfrm>
+          <a:prstGeom prst="rect">
+            <a:avLst/>
+          </a:prstGeom>
+          <a:noFill/>
+          <a:ln/>
+        </p:spPr>
+        <p:txBody>
+          <a:bodyPr wrap="square" rtlCol="0" anchor="ctr"/>
+          <a:lstStyle/>
+          <a:p>
+            <a:pPr algn="l" indent="0" marL="0">
+              <a:buNone/>
+            </a:pPr>
+            <a:r>
+              <a:rPr lang="en-US" sz="1300" b="1" dirty="0">
                 <a:solidFill>
                   <a:srgbClr val="000000"/>
                 </a:solidFill>
@@ -6898,7 +6898,7 @@
               </a:rPr>
               <a:t>关键洞察</a:t>
             </a:r>
-            <a:endParaRPr lang="en-US" sz="1400" dirty="0"/>
+            <a:endParaRPr lang="en-US" sz="1300" dirty="0"/>
           </a:p>
         </p:txBody>
       </p:sp>
@@ -6910,24 +6910,24 @@
         </p:nvSpPr>
         <p:spPr>
           <a:xfrm>
-            <a:off x="457200" y="1737360"/>
-            <a:ext cx="3840480" cy="228600"/>
-          </a:xfrm>
-          <a:prstGeom prst="rect">
-            <a:avLst/>
-          </a:prstGeom>
-          <a:noFill/>
-          <a:ln/>
-        </p:spPr>
-        <p:txBody>
-          <a:bodyPr wrap="square" rtlCol="0" anchor="ctr"/>
-          <a:lstStyle/>
-          <a:p>
-            <a:pPr algn="l" indent="0" marL="0">
-              <a:buNone/>
-            </a:pPr>
-            <a:r>
-              <a:rPr lang="en-US" sz="1100" b="1" dirty="0">
+            <a:off x="457200" y="1600200"/>
+            <a:ext cx="3840480" cy="201168"/>
+          </a:xfrm>
+          <a:prstGeom prst="rect">
+            <a:avLst/>
+          </a:prstGeom>
+          <a:noFill/>
+          <a:ln/>
+        </p:spPr>
+        <p:txBody>
+          <a:bodyPr wrap="square" rtlCol="0" anchor="ctr"/>
+          <a:lstStyle/>
+          <a:p>
+            <a:pPr algn="l" indent="0" marL="0">
+              <a:buNone/>
+            </a:pPr>
+            <a:r>
+              <a:rPr lang="en-US" sz="1000" b="1" dirty="0">
                 <a:solidFill>
                   <a:srgbClr val="000000"/>
                 </a:solidFill>
@@ -6937,7 +6937,7 @@
               </a:rPr>
               <a:t>✓ 预警确实存在</a:t>
             </a:r>
-            <a:endParaRPr lang="en-US" sz="1100" dirty="0"/>
+            <a:endParaRPr lang="en-US" sz="1000" dirty="0"/>
           </a:p>
         </p:txBody>
       </p:sp>
@@ -6949,24 +6949,24 @@
         </p:nvSpPr>
         <p:spPr>
           <a:xfrm>
-            <a:off x="457200" y="1947672"/>
-            <a:ext cx="3840480" cy="411480"/>
-          </a:xfrm>
-          <a:prstGeom prst="rect">
-            <a:avLst/>
-          </a:prstGeom>
-          <a:noFill/>
-          <a:ln/>
-        </p:spPr>
-        <p:txBody>
-          <a:bodyPr wrap="square" rtlCol="0" anchor="ctr"/>
-          <a:lstStyle/>
-          <a:p>
-            <a:pPr algn="l" indent="0" marL="0">
-              <a:buNone/>
-            </a:pPr>
-            <a:r>
-              <a:rPr lang="en-US" sz="1000" dirty="0">
+            <a:off x="457200" y="1783080"/>
+            <a:ext cx="3840480" cy="365760"/>
+          </a:xfrm>
+          <a:prstGeom prst="rect">
+            <a:avLst/>
+          </a:prstGeom>
+          <a:noFill/>
+          <a:ln/>
+        </p:spPr>
+        <p:txBody>
+          <a:bodyPr wrap="square" rtlCol="0" anchor="ctr"/>
+          <a:lstStyle/>
+          <a:p>
+            <a:pPr algn="l" indent="0" marL="0">
+              <a:buNone/>
+            </a:pPr>
+            <a:r>
+              <a:rPr lang="en-US" sz="900" dirty="0">
                 <a:solidFill>
                   <a:srgbClr val="666666"/>
                 </a:solidFill>
@@ -6976,36 +6976,114 @@
               </a:rPr>
               <a:t>激励确实定得高、难达成，这是事实</a:t>
             </a:r>
+            <a:endParaRPr lang="en-US" sz="900" dirty="0"/>
+          </a:p>
+        </p:txBody>
+      </p:sp>
+      <p:sp>
+        <p:nvSpPr>
+          <p:cNvPr id="7" name="Text 5"/>
+          <p:cNvSpPr/>
+          <p:nvPr/>
+        </p:nvSpPr>
+        <p:spPr>
+          <a:xfrm>
+            <a:off x="457200" y="2240280"/>
+            <a:ext cx="3840480" cy="201168"/>
+          </a:xfrm>
+          <a:prstGeom prst="rect">
+            <a:avLst/>
+          </a:prstGeom>
+          <a:noFill/>
+          <a:ln/>
+        </p:spPr>
+        <p:txBody>
+          <a:bodyPr wrap="square" rtlCol="0" anchor="ctr"/>
+          <a:lstStyle/>
+          <a:p>
+            <a:pPr algn="l" indent="0" marL="0">
+              <a:buNone/>
+            </a:pPr>
+            <a:r>
+              <a:rPr lang="en-US" sz="1000" b="1" dirty="0">
+                <a:solidFill>
+                  <a:srgbClr val="000000"/>
+                </a:solidFill>
+                <a:latin typeface="Microsoft YaHei" pitchFamily="34" charset="0"/>
+                <a:ea typeface="Microsoft YaHei" pitchFamily="34" charset="-122"/>
+                <a:cs typeface="Microsoft YaHei" pitchFamily="34" charset="-120"/>
+              </a:rPr>
+              <a:t>✓ 但方式有问题</a:t>
+            </a:r>
             <a:endParaRPr lang="en-US" sz="1000" dirty="0"/>
           </a:p>
         </p:txBody>
       </p:sp>
       <p:sp>
         <p:nvSpPr>
-          <p:cNvPr id="7" name="Text 5"/>
+          <p:cNvPr id="8" name="Text 6"/>
           <p:cNvSpPr/>
           <p:nvPr/>
         </p:nvSpPr>
         <p:spPr>
           <a:xfrm>
             <a:off x="457200" y="2423160"/>
-            <a:ext cx="3840480" cy="228600"/>
-          </a:xfrm>
-          <a:prstGeom prst="rect">
-            <a:avLst/>
-          </a:prstGeom>
-          <a:noFill/>
-          <a:ln/>
-        </p:spPr>
-        <p:txBody>
-          <a:bodyPr wrap="square" rtlCol="0" anchor="ctr"/>
-          <a:lstStyle/>
-          <a:p>
-            <a:pPr algn="l" indent="0" marL="0">
-              <a:buNone/>
-            </a:pPr>
-            <a:r>
-              <a:rPr lang="en-US" sz="1100" b="1" dirty="0">
+            <a:ext cx="3840480" cy="365760"/>
+          </a:xfrm>
+          <a:prstGeom prst="rect">
+            <a:avLst/>
+          </a:prstGeom>
+          <a:noFill/>
+          <a:ln/>
+        </p:spPr>
+        <p:txBody>
+          <a:bodyPr wrap="square" rtlCol="0" anchor="ctr"/>
+          <a:lstStyle/>
+          <a:p>
+            <a:pPr algn="l" indent="0" marL="0">
+              <a:buNone/>
+            </a:pPr>
+            <a:r>
+              <a:rPr lang="en-US" sz="900" dirty="0">
+                <a:solidFill>
+                  <a:srgbClr val="666666"/>
+                </a:solidFill>
+                <a:latin typeface="Microsoft YaHei" pitchFamily="34" charset="0"/>
+                <a:ea typeface="Microsoft YaHei" pitchFamily="34" charset="-122"/>
+                <a:cs typeface="Microsoft YaHei" pitchFamily="34" charset="-120"/>
+              </a:rPr>
+              <a:t>选择性攻击、群里放炮、道德绑架、破坏安全感</a:t>
+            </a:r>
+            <a:endParaRPr lang="en-US" sz="900" dirty="0"/>
+          </a:p>
+        </p:txBody>
+      </p:sp>
+      <p:sp>
+        <p:nvSpPr>
+          <p:cNvPr id="9" name="Text 7"/>
+          <p:cNvSpPr/>
+          <p:nvPr/>
+        </p:nvSpPr>
+        <p:spPr>
+          <a:xfrm>
+            <a:off x="457200" y="2880360"/>
+            <a:ext cx="3840480" cy="201168"/>
+          </a:xfrm>
+          <a:prstGeom prst="rect">
+            <a:avLst/>
+          </a:prstGeom>
+          <a:noFill/>
+          <a:ln/>
+        </p:spPr>
+        <p:txBody>
+          <a:bodyPr wrap="square" rtlCol="0" anchor="ctr"/>
+          <a:lstStyle/>
+          <a:p>
+            <a:pPr algn="l" indent="0" marL="0">
+              <a:buNone/>
+            </a:pPr>
+            <a:r>
+              <a:rPr lang="en-US" sz="1000" b="1" dirty="0">
                 <a:solidFill>
                   <a:srgbClr val="000000"/>
                 </a:solidFill>
@@ -7013,38 +7091,38 @@
                 <a:ea typeface="Microsoft YaHei" pitchFamily="34" charset="-122"/>
                 <a:cs typeface="Microsoft YaHei" pitchFamily="34" charset="-120"/>
               </a:rPr>
-              <a:t>✓ 但方式有问题</a:t>
-            </a:r>
-            <a:endParaRPr lang="en-US" sz="1100" dirty="0"/>
-          </a:p>
-        </p:txBody>
-      </p:sp>
-      <p:sp>
-        <p:nvSpPr>
-          <p:cNvPr id="8" name="Text 6"/>
-          <p:cNvSpPr/>
-          <p:nvPr/>
-        </p:nvSpPr>
-        <p:spPr>
-          <a:xfrm>
-            <a:off x="457200" y="2633472"/>
-            <a:ext cx="3840480" cy="411480"/>
-          </a:xfrm>
-          <a:prstGeom prst="rect">
-            <a:avLst/>
-          </a:prstGeom>
-          <a:noFill/>
-          <a:ln/>
-        </p:spPr>
-        <p:txBody>
-          <a:bodyPr wrap="square" rtlCol="0" anchor="ctr"/>
-          <a:lstStyle/>
-          <a:p>
-            <a:pPr algn="l" indent="0" marL="0">
-              <a:buNone/>
-            </a:pPr>
-            <a:r>
-              <a:rPr lang="en-US" sz="1000" dirty="0">
+              <a:t>✓ 核心动机</a:t>
+            </a:r>
+            <a:endParaRPr lang="en-US" sz="1000" dirty="0"/>
+          </a:p>
+        </p:txBody>
+      </p:sp>
+      <p:sp>
+        <p:nvSpPr>
+          <p:cNvPr id="10" name="Text 8"/>
+          <p:cNvSpPr/>
+          <p:nvPr/>
+        </p:nvSpPr>
+        <p:spPr>
+          <a:xfrm>
+            <a:off x="457200" y="3063240"/>
+            <a:ext cx="3840480" cy="365760"/>
+          </a:xfrm>
+          <a:prstGeom prst="rect">
+            <a:avLst/>
+          </a:prstGeom>
+          <a:noFill/>
+          <a:ln/>
+        </p:spPr>
+        <p:txBody>
+          <a:bodyPr wrap="square" rtlCol="0" anchor="ctr"/>
+          <a:lstStyle/>
+          <a:p>
+            <a:pPr algn="l" indent="0" marL="0">
+              <a:buNone/>
+            </a:pPr>
+            <a:r>
+              <a:rPr lang="en-US" sz="900" dirty="0">
                 <a:solidFill>
                   <a:srgbClr val="666666"/>
                 </a:solidFill>
@@ -7052,7 +7130,46 @@
                 <a:ea typeface="Microsoft YaHei" pitchFamily="34" charset="-122"/>
                 <a:cs typeface="Microsoft YaHei" pitchFamily="34" charset="-120"/>
               </a:rPr>
-              <a:t>选择性攻击、群里放炮、道德绑架、破坏安全感</a:t>
+              <a:t>表演型预警 + 转移视线 + 保护关系网</a:t>
+            </a:r>
+            <a:endParaRPr lang="en-US" sz="900" dirty="0"/>
+          </a:p>
+        </p:txBody>
+      </p:sp>
+      <p:sp>
+        <p:nvSpPr>
+          <p:cNvPr id="11" name="Text 9"/>
+          <p:cNvSpPr/>
+          <p:nvPr/>
+        </p:nvSpPr>
+        <p:spPr>
+          <a:xfrm>
+            <a:off x="457200" y="3520440"/>
+            <a:ext cx="3840480" cy="201168"/>
+          </a:xfrm>
+          <a:prstGeom prst="rect">
+            <a:avLst/>
+          </a:prstGeom>
+          <a:noFill/>
+          <a:ln/>
+        </p:spPr>
+        <p:txBody>
+          <a:bodyPr wrap="square" rtlCol="0" anchor="ctr"/>
+          <a:lstStyle/>
+          <a:p>
+            <a:pPr algn="l" indent="0" marL="0">
+              <a:buNone/>
+            </a:pPr>
+            <a:r>
+              <a:rPr lang="en-US" sz="1000" b="1" dirty="0">
+                <a:solidFill>
+                  <a:srgbClr val="000000"/>
+                </a:solidFill>
+                <a:latin typeface="Microsoft YaHei" pitchFamily="34" charset="0"/>
+                <a:ea typeface="Microsoft YaHei" pitchFamily="34" charset="-122"/>
+                <a:cs typeface="Microsoft YaHei" pitchFamily="34" charset="-120"/>
+              </a:rPr>
+              <a:t>✓ 工作方式</a:t>
             </a:r>
             <a:endParaRPr lang="en-US" sz="1000" dirty="0"/>
           </a:p>
@@ -7060,30 +7177,69 @@
       </p:sp>
       <p:sp>
         <p:nvSpPr>
-          <p:cNvPr id="9" name="Text 7"/>
-          <p:cNvSpPr/>
-          <p:nvPr/>
-        </p:nvSpPr>
-        <p:spPr>
-          <a:xfrm>
-            <a:off x="457200" y="3108960"/>
-            <a:ext cx="3840480" cy="228600"/>
-          </a:xfrm>
-          <a:prstGeom prst="rect">
-            <a:avLst/>
-          </a:prstGeom>
-          <a:noFill/>
-          <a:ln/>
-        </p:spPr>
-        <p:txBody>
-          <a:bodyPr wrap="square" rtlCol="0" anchor="ctr"/>
-          <a:lstStyle/>
-          <a:p>
-            <a:pPr algn="l" indent="0" marL="0">
-              <a:buNone/>
-            </a:pPr>
-            <a:r>
-              <a:rPr lang="en-US" sz="1100" b="1" dirty="0">
+          <p:cNvPr id="12" name="Text 10"/>
+          <p:cNvSpPr/>
+          <p:nvPr/>
+        </p:nvSpPr>
+        <p:spPr>
+          <a:xfrm>
+            <a:off x="457200" y="3703320"/>
+            <a:ext cx="3840480" cy="365760"/>
+          </a:xfrm>
+          <a:prstGeom prst="rect">
+            <a:avLst/>
+          </a:prstGeom>
+          <a:noFill/>
+          <a:ln/>
+        </p:spPr>
+        <p:txBody>
+          <a:bodyPr wrap="square" rtlCol="0" anchor="ctr"/>
+          <a:lstStyle/>
+          <a:p>
+            <a:pPr algn="l" indent="0" marL="0">
+              <a:buNone/>
+            </a:pPr>
+            <a:r>
+              <a:rPr lang="en-US" sz="900" dirty="0">
+                <a:solidFill>
+                  <a:srgbClr val="666666"/>
+                </a:solidFill>
+                <a:latin typeface="Microsoft YaHei" pitchFamily="34" charset="0"/>
+                <a:ea typeface="Microsoft YaHei" pitchFamily="34" charset="-122"/>
+                <a:cs typeface="Microsoft YaHei" pitchFamily="34" charset="-120"/>
+              </a:rPr>
+              <a:t>不是正常的工作方式，让人觉得动机有问题</a:t>
+            </a:r>
+            <a:endParaRPr lang="en-US" sz="900" dirty="0"/>
+          </a:p>
+        </p:txBody>
+      </p:sp>
+      <p:sp>
+        <p:nvSpPr>
+          <p:cNvPr id="13" name="Text 11"/>
+          <p:cNvSpPr/>
+          <p:nvPr/>
+        </p:nvSpPr>
+        <p:spPr>
+          <a:xfrm>
+            <a:off x="4663440" y="1280160"/>
+            <a:ext cx="4023360" cy="274320"/>
+          </a:xfrm>
+          <a:prstGeom prst="rect">
+            <a:avLst/>
+          </a:prstGeom>
+          <a:noFill/>
+          <a:ln/>
+        </p:spPr>
+        <p:txBody>
+          <a:bodyPr wrap="square" rtlCol="0" anchor="ctr"/>
+          <a:lstStyle/>
+          <a:p>
+            <a:pPr algn="l" indent="0" marL="0">
+              <a:buNone/>
+            </a:pPr>
+            <a:r>
+              <a:rPr lang="en-US" sz="1300" b="1" dirty="0">
                 <a:solidFill>
                   <a:srgbClr val="000000"/>
                 </a:solidFill>
@@ -7091,38 +7247,77 @@
                 <a:ea typeface="Microsoft YaHei" pitchFamily="34" charset="-122"/>
                 <a:cs typeface="Microsoft YaHei" pitchFamily="34" charset="-120"/>
               </a:rPr>
-              <a:t>✓ 核心动机</a:t>
-            </a:r>
-            <a:endParaRPr lang="en-US" sz="1100" dirty="0"/>
-          </a:p>
-        </p:txBody>
-      </p:sp>
-      <p:sp>
-        <p:nvSpPr>
-          <p:cNvPr id="10" name="Text 8"/>
-          <p:cNvSpPr/>
-          <p:nvPr/>
-        </p:nvSpPr>
-        <p:spPr>
-          <a:xfrm>
-            <a:off x="457200" y="3319272"/>
-            <a:ext cx="3840480" cy="411480"/>
-          </a:xfrm>
-          <a:prstGeom prst="rect">
-            <a:avLst/>
-          </a:prstGeom>
-          <a:noFill/>
-          <a:ln/>
-        </p:spPr>
-        <p:txBody>
-          <a:bodyPr wrap="square" rtlCol="0" anchor="ctr"/>
-          <a:lstStyle/>
-          <a:p>
-            <a:pPr algn="l" indent="0" marL="0">
-              <a:buNone/>
-            </a:pPr>
-            <a:r>
-              <a:rPr lang="en-US" sz="1000" dirty="0">
+              <a:t>行动指南</a:t>
+            </a:r>
+            <a:endParaRPr lang="en-US" sz="1300" dirty="0"/>
+          </a:p>
+        </p:txBody>
+      </p:sp>
+      <p:sp>
+        <p:nvSpPr>
+          <p:cNvPr id="14" name="Text 12"/>
+          <p:cNvSpPr/>
+          <p:nvPr/>
+        </p:nvSpPr>
+        <p:spPr>
+          <a:xfrm>
+            <a:off x="4663440" y="1600200"/>
+            <a:ext cx="4023360" cy="201168"/>
+          </a:xfrm>
+          <a:prstGeom prst="rect">
+            <a:avLst/>
+          </a:prstGeom>
+          <a:noFill/>
+          <a:ln/>
+        </p:spPr>
+        <p:txBody>
+          <a:bodyPr wrap="square" rtlCol="0" anchor="ctr"/>
+          <a:lstStyle/>
+          <a:p>
+            <a:pPr algn="l" indent="0" marL="0">
+              <a:buNone/>
+            </a:pPr>
+            <a:r>
+              <a:rPr lang="en-US" sz="1000" b="1" dirty="0">
+                <a:solidFill>
+                  <a:srgbClr val="D70015"/>
+                </a:solidFill>
+                <a:latin typeface="Microsoft YaHei" pitchFamily="34" charset="0"/>
+                <a:ea typeface="Microsoft YaHei" pitchFamily="34" charset="-122"/>
+                <a:cs typeface="Microsoft YaHei" pitchFamily="34" charset="-120"/>
+              </a:rPr>
+              <a:t>→ 识别模式</a:t>
+            </a:r>
+            <a:endParaRPr lang="en-US" sz="1000" dirty="0"/>
+          </a:p>
+        </p:txBody>
+      </p:sp>
+      <p:sp>
+        <p:nvSpPr>
+          <p:cNvPr id="15" name="Text 13"/>
+          <p:cNvSpPr/>
+          <p:nvPr/>
+        </p:nvSpPr>
+        <p:spPr>
+          <a:xfrm>
+            <a:off x="4663440" y="1783080"/>
+            <a:ext cx="4023360" cy="365760"/>
+          </a:xfrm>
+          <a:prstGeom prst="rect">
+            <a:avLst/>
+          </a:prstGeom>
+          <a:noFill/>
+          <a:ln/>
+        </p:spPr>
+        <p:txBody>
+          <a:bodyPr wrap="square" rtlCol="0" anchor="ctr"/>
+          <a:lstStyle/>
+          <a:p>
+            <a:pPr algn="l" indent="0" marL="0">
+              <a:buNone/>
+            </a:pPr>
+            <a:r>
+              <a:rPr lang="en-US" sz="900" dirty="0">
                 <a:solidFill>
                   <a:srgbClr val="666666"/>
                 </a:solidFill>
@@ -7130,7 +7325,46 @@
                 <a:ea typeface="Microsoft YaHei" pitchFamily="34" charset="-122"/>
                 <a:cs typeface="Microsoft YaHei" pitchFamily="34" charset="-120"/>
               </a:rPr>
-              <a:t>表演型预警 + 转移视线 + 保护关系网</a:t>
+              <a:t>认清这是"表演型预警"，不是真的危机</a:t>
+            </a:r>
+            <a:endParaRPr lang="en-US" sz="900" dirty="0"/>
+          </a:p>
+        </p:txBody>
+      </p:sp>
+      <p:sp>
+        <p:nvSpPr>
+          <p:cNvPr id="16" name="Text 14"/>
+          <p:cNvSpPr/>
+          <p:nvPr/>
+        </p:nvSpPr>
+        <p:spPr>
+          <a:xfrm>
+            <a:off x="4663440" y="2240280"/>
+            <a:ext cx="4023360" cy="201168"/>
+          </a:xfrm>
+          <a:prstGeom prst="rect">
+            <a:avLst/>
+          </a:prstGeom>
+          <a:noFill/>
+          <a:ln/>
+        </p:spPr>
+        <p:txBody>
+          <a:bodyPr wrap="square" rtlCol="0" anchor="ctr"/>
+          <a:lstStyle/>
+          <a:p>
+            <a:pPr algn="l" indent="0" marL="0">
+              <a:buNone/>
+            </a:pPr>
+            <a:r>
+              <a:rPr lang="en-US" sz="1000" b="1" dirty="0">
+                <a:solidFill>
+                  <a:srgbClr val="D70015"/>
+                </a:solidFill>
+                <a:latin typeface="Microsoft YaHei" pitchFamily="34" charset="0"/>
+                <a:ea typeface="Microsoft YaHei" pitchFamily="34" charset="-122"/>
+                <a:cs typeface="Microsoft YaHei" pitchFamily="34" charset="-120"/>
+              </a:rPr>
+              <a:t>→ 不接靶子</a:t>
             </a:r>
             <a:endParaRPr lang="en-US" sz="1000" dirty="0"/>
           </a:p>
@@ -7138,69 +7372,30 @@
       </p:sp>
       <p:sp>
         <p:nvSpPr>
-          <p:cNvPr id="11" name="Text 9"/>
-          <p:cNvSpPr/>
-          <p:nvPr/>
-        </p:nvSpPr>
-        <p:spPr>
-          <a:xfrm>
-            <a:off x="457200" y="3794760"/>
-            <a:ext cx="3840480" cy="228600"/>
-          </a:xfrm>
-          <a:prstGeom prst="rect">
-            <a:avLst/>
-          </a:prstGeom>
-          <a:noFill/>
-          <a:ln/>
-        </p:spPr>
-        <p:txBody>
-          <a:bodyPr wrap="square" rtlCol="0" anchor="ctr"/>
-          <a:lstStyle/>
-          <a:p>
-            <a:pPr algn="l" indent="0" marL="0">
-              <a:buNone/>
-            </a:pPr>
-            <a:r>
-              <a:rPr lang="en-US" sz="1100" b="1" dirty="0">
-                <a:solidFill>
-                  <a:srgbClr val="000000"/>
-                </a:solidFill>
-                <a:latin typeface="Microsoft YaHei" pitchFamily="34" charset="0"/>
-                <a:ea typeface="Microsoft YaHei" pitchFamily="34" charset="-122"/>
-                <a:cs typeface="Microsoft YaHei" pitchFamily="34" charset="-120"/>
-              </a:rPr>
-              <a:t>✓ 工作方式</a:t>
-            </a:r>
-            <a:endParaRPr lang="en-US" sz="1100" dirty="0"/>
-          </a:p>
-        </p:txBody>
-      </p:sp>
-      <p:sp>
-        <p:nvSpPr>
-          <p:cNvPr id="12" name="Text 10"/>
-          <p:cNvSpPr/>
-          <p:nvPr/>
-        </p:nvSpPr>
-        <p:spPr>
-          <a:xfrm>
-            <a:off x="457200" y="4005072"/>
-            <a:ext cx="3840480" cy="411480"/>
-          </a:xfrm>
-          <a:prstGeom prst="rect">
-            <a:avLst/>
-          </a:prstGeom>
-          <a:noFill/>
-          <a:ln/>
-        </p:spPr>
-        <p:txBody>
-          <a:bodyPr wrap="square" rtlCol="0" anchor="ctr"/>
-          <a:lstStyle/>
-          <a:p>
-            <a:pPr algn="l" indent="0" marL="0">
-              <a:buNone/>
-            </a:pPr>
-            <a:r>
-              <a:rPr lang="en-US" sz="1000" dirty="0">
+          <p:cNvPr id="17" name="Text 15"/>
+          <p:cNvSpPr/>
+          <p:nvPr/>
+        </p:nvSpPr>
+        <p:spPr>
+          <a:xfrm>
+            <a:off x="4663440" y="2423160"/>
+            <a:ext cx="4023360" cy="365760"/>
+          </a:xfrm>
+          <a:prstGeom prst="rect">
+            <a:avLst/>
+          </a:prstGeom>
+          <a:noFill/>
+          <a:ln/>
+        </p:spPr>
+        <p:txBody>
+          <a:bodyPr wrap="square" rtlCol="0" anchor="ctr"/>
+          <a:lstStyle/>
+          <a:p>
+            <a:pPr algn="l" indent="0" marL="0">
+              <a:buNone/>
+            </a:pPr>
+            <a:r>
+              <a:rPr lang="en-US" sz="900" dirty="0">
                 <a:solidFill>
                   <a:srgbClr val="666666"/>
                 </a:solidFill>
@@ -7208,7 +7403,46 @@
                 <a:ea typeface="Microsoft YaHei" pitchFamily="34" charset="-122"/>
                 <a:cs typeface="Microsoft YaHei" pitchFamily="34" charset="-120"/>
               </a:rPr>
-              <a:t>不是正常的工作方式，让人觉得动机有问题</a:t>
+              <a:t>不说"激励/策略确实有问题"</a:t>
+            </a:r>
+            <a:endParaRPr lang="en-US" sz="900" dirty="0"/>
+          </a:p>
+        </p:txBody>
+      </p:sp>
+      <p:sp>
+        <p:nvSpPr>
+          <p:cNvPr id="18" name="Text 16"/>
+          <p:cNvSpPr/>
+          <p:nvPr/>
+        </p:nvSpPr>
+        <p:spPr>
+          <a:xfrm>
+            <a:off x="4663440" y="2880360"/>
+            <a:ext cx="4023360" cy="201168"/>
+          </a:xfrm>
+          <a:prstGeom prst="rect">
+            <a:avLst/>
+          </a:prstGeom>
+          <a:noFill/>
+          <a:ln/>
+        </p:spPr>
+        <p:txBody>
+          <a:bodyPr wrap="square" rtlCol="0" anchor="ctr"/>
+          <a:lstStyle/>
+          <a:p>
+            <a:pPr algn="l" indent="0" marL="0">
+              <a:buNone/>
+            </a:pPr>
+            <a:r>
+              <a:rPr lang="en-US" sz="1000" b="1" dirty="0">
+                <a:solidFill>
+                  <a:srgbClr val="D70015"/>
+                </a:solidFill>
+                <a:latin typeface="Microsoft YaHei" pitchFamily="34" charset="0"/>
+                <a:ea typeface="Microsoft YaHei" pitchFamily="34" charset="-122"/>
+                <a:cs typeface="Microsoft YaHei" pitchFamily="34" charset="-120"/>
+              </a:rPr>
+              <a:t>→ 回归事实</a:t>
             </a:r>
             <a:endParaRPr lang="en-US" sz="1000" dirty="0"/>
           </a:p>
@@ -7216,69 +7450,69 @@
       </p:sp>
       <p:sp>
         <p:nvSpPr>
-          <p:cNvPr id="13" name="Text 11"/>
-          <p:cNvSpPr/>
-          <p:nvPr/>
-        </p:nvSpPr>
-        <p:spPr>
-          <a:xfrm>
-            <a:off x="4663440" y="1371600"/>
-            <a:ext cx="4023360" cy="320040"/>
-          </a:xfrm>
-          <a:prstGeom prst="rect">
-            <a:avLst/>
-          </a:prstGeom>
-          <a:noFill/>
-          <a:ln/>
-        </p:spPr>
-        <p:txBody>
-          <a:bodyPr wrap="square" rtlCol="0" anchor="ctr"/>
-          <a:lstStyle/>
-          <a:p>
-            <a:pPr algn="l" indent="0" marL="0">
-              <a:buNone/>
-            </a:pPr>
-            <a:r>
-              <a:rPr lang="en-US" sz="1400" b="1" dirty="0">
-                <a:solidFill>
-                  <a:srgbClr val="000000"/>
-                </a:solidFill>
-                <a:latin typeface="Microsoft YaHei" pitchFamily="34" charset="0"/>
-                <a:ea typeface="Microsoft YaHei" pitchFamily="34" charset="-122"/>
-                <a:cs typeface="Microsoft YaHei" pitchFamily="34" charset="-120"/>
-              </a:rPr>
-              <a:t>行动指南</a:t>
-            </a:r>
-            <a:endParaRPr lang="en-US" sz="1400" dirty="0"/>
-          </a:p>
-        </p:txBody>
-      </p:sp>
-      <p:sp>
-        <p:nvSpPr>
-          <p:cNvPr id="14" name="Text 12"/>
-          <p:cNvSpPr/>
-          <p:nvPr/>
-        </p:nvSpPr>
-        <p:spPr>
-          <a:xfrm>
-            <a:off x="4663440" y="1737360"/>
-            <a:ext cx="4023360" cy="228600"/>
-          </a:xfrm>
-          <a:prstGeom prst="rect">
-            <a:avLst/>
-          </a:prstGeom>
-          <a:noFill/>
-          <a:ln/>
-        </p:spPr>
-        <p:txBody>
-          <a:bodyPr wrap="square" rtlCol="0" anchor="ctr"/>
-          <a:lstStyle/>
-          <a:p>
-            <a:pPr algn="l" indent="0" marL="0">
-              <a:buNone/>
-            </a:pPr>
-            <a:r>
-              <a:rPr lang="en-US" sz="1100" b="1" dirty="0">
+          <p:cNvPr id="19" name="Text 17"/>
+          <p:cNvSpPr/>
+          <p:nvPr/>
+        </p:nvSpPr>
+        <p:spPr>
+          <a:xfrm>
+            <a:off x="4663440" y="3063240"/>
+            <a:ext cx="4023360" cy="365760"/>
+          </a:xfrm>
+          <a:prstGeom prst="rect">
+            <a:avLst/>
+          </a:prstGeom>
+          <a:noFill/>
+          <a:ln/>
+        </p:spPr>
+        <p:txBody>
+          <a:bodyPr wrap="square" rtlCol="0" anchor="ctr"/>
+          <a:lstStyle/>
+          <a:p>
+            <a:pPr algn="l" indent="0" marL="0">
+              <a:buNone/>
+            </a:pPr>
+            <a:r>
+              <a:rPr lang="en-US" sz="900" dirty="0">
+                <a:solidFill>
+                  <a:srgbClr val="666666"/>
+                </a:solidFill>
+                <a:latin typeface="Microsoft YaHei" pitchFamily="34" charset="0"/>
+                <a:ea typeface="Microsoft YaHei" pitchFamily="34" charset="-122"/>
+                <a:cs typeface="Microsoft YaHei" pitchFamily="34" charset="-120"/>
+              </a:rPr>
+              <a:t>指出"交接期信息真空、数据中断"</a:t>
+            </a:r>
+            <a:endParaRPr lang="en-US" sz="900" dirty="0"/>
+          </a:p>
+        </p:txBody>
+      </p:sp>
+      <p:sp>
+        <p:nvSpPr>
+          <p:cNvPr id="20" name="Text 18"/>
+          <p:cNvSpPr/>
+          <p:nvPr/>
+        </p:nvSpPr>
+        <p:spPr>
+          <a:xfrm>
+            <a:off x="4663440" y="3520440"/>
+            <a:ext cx="4023360" cy="201168"/>
+          </a:xfrm>
+          <a:prstGeom prst="rect">
+            <a:avLst/>
+          </a:prstGeom>
+          <a:noFill/>
+          <a:ln/>
+        </p:spPr>
+        <p:txBody>
+          <a:bodyPr wrap="square" rtlCol="0" anchor="ctr"/>
+          <a:lstStyle/>
+          <a:p>
+            <a:pPr algn="l" indent="0" marL="0">
+              <a:buNone/>
+            </a:pPr>
+            <a:r>
+              <a:rPr lang="en-US" sz="1000" b="1" dirty="0">
                 <a:solidFill>
                   <a:srgbClr val="D70015"/>
                 </a:solidFill>
@@ -7286,38 +7520,38 @@
                 <a:ea typeface="Microsoft YaHei" pitchFamily="34" charset="-122"/>
                 <a:cs typeface="Microsoft YaHei" pitchFamily="34" charset="-120"/>
               </a:rPr>
-              <a:t>→ 识别模式</a:t>
-            </a:r>
-            <a:endParaRPr lang="en-US" sz="1100" dirty="0"/>
-          </a:p>
-        </p:txBody>
-      </p:sp>
-      <p:sp>
-        <p:nvSpPr>
-          <p:cNvPr id="15" name="Text 13"/>
-          <p:cNvSpPr/>
-          <p:nvPr/>
-        </p:nvSpPr>
-        <p:spPr>
-          <a:xfrm>
-            <a:off x="4663440" y="1947672"/>
-            <a:ext cx="4023360" cy="411480"/>
-          </a:xfrm>
-          <a:prstGeom prst="rect">
-            <a:avLst/>
-          </a:prstGeom>
-          <a:noFill/>
-          <a:ln/>
-        </p:spPr>
-        <p:txBody>
-          <a:bodyPr wrap="square" rtlCol="0" anchor="ctr"/>
-          <a:lstStyle/>
-          <a:p>
-            <a:pPr algn="l" indent="0" marL="0">
-              <a:buNone/>
-            </a:pPr>
-            <a:r>
-              <a:rPr lang="en-US" sz="1000" dirty="0">
+              <a:t>→ 保护安全感</a:t>
+            </a:r>
+            <a:endParaRPr lang="en-US" sz="1000" dirty="0"/>
+          </a:p>
+        </p:txBody>
+      </p:sp>
+      <p:sp>
+        <p:nvSpPr>
+          <p:cNvPr id="21" name="Text 19"/>
+          <p:cNvSpPr/>
+          <p:nvPr/>
+        </p:nvSpPr>
+        <p:spPr>
+          <a:xfrm>
+            <a:off x="4663440" y="3703320"/>
+            <a:ext cx="4023360" cy="365760"/>
+          </a:xfrm>
+          <a:prstGeom prst="rect">
+            <a:avLst/>
+          </a:prstGeom>
+          <a:noFill/>
+          <a:ln/>
+        </p:spPr>
+        <p:txBody>
+          <a:bodyPr wrap="square" rtlCol="0" anchor="ctr"/>
+          <a:lstStyle/>
+          <a:p>
+            <a:pPr algn="l" indent="0" marL="0">
+              <a:buNone/>
+            </a:pPr>
+            <a:r>
+              <a:rPr lang="en-US" sz="900" dirty="0">
                 <a:solidFill>
                   <a:srgbClr val="666666"/>
                 </a:solidFill>
@@ -7325,243 +7559,9 @@
                 <a:ea typeface="Microsoft YaHei" pitchFamily="34" charset="-122"/>
                 <a:cs typeface="Microsoft YaHei" pitchFamily="34" charset="-120"/>
               </a:rPr>
-              <a:t>认清这是"表演型预警"，不是真的危机</a:t>
-            </a:r>
-            <a:endParaRPr lang="en-US" sz="1000" dirty="0"/>
-          </a:p>
-        </p:txBody>
-      </p:sp>
-      <p:sp>
-        <p:nvSpPr>
-          <p:cNvPr id="16" name="Text 14"/>
-          <p:cNvSpPr/>
-          <p:nvPr/>
-        </p:nvSpPr>
-        <p:spPr>
-          <a:xfrm>
-            <a:off x="4663440" y="2423160"/>
-            <a:ext cx="4023360" cy="228600"/>
-          </a:xfrm>
-          <a:prstGeom prst="rect">
-            <a:avLst/>
-          </a:prstGeom>
-          <a:noFill/>
-          <a:ln/>
-        </p:spPr>
-        <p:txBody>
-          <a:bodyPr wrap="square" rtlCol="0" anchor="ctr"/>
-          <a:lstStyle/>
-          <a:p>
-            <a:pPr algn="l" indent="0" marL="0">
-              <a:buNone/>
-            </a:pPr>
-            <a:r>
-              <a:rPr lang="en-US" sz="1100" b="1" dirty="0">
-                <a:solidFill>
-                  <a:srgbClr val="D70015"/>
-                </a:solidFill>
-                <a:latin typeface="Microsoft YaHei" pitchFamily="34" charset="0"/>
-                <a:ea typeface="Microsoft YaHei" pitchFamily="34" charset="-122"/>
-                <a:cs typeface="Microsoft YaHei" pitchFamily="34" charset="-120"/>
-              </a:rPr>
-              <a:t>→ 不接靶子</a:t>
-            </a:r>
-            <a:endParaRPr lang="en-US" sz="1100" dirty="0"/>
-          </a:p>
-        </p:txBody>
-      </p:sp>
-      <p:sp>
-        <p:nvSpPr>
-          <p:cNvPr id="17" name="Text 15"/>
-          <p:cNvSpPr/>
-          <p:nvPr/>
-        </p:nvSpPr>
-        <p:spPr>
-          <a:xfrm>
-            <a:off x="4663440" y="2633472"/>
-            <a:ext cx="4023360" cy="411480"/>
-          </a:xfrm>
-          <a:prstGeom prst="rect">
-            <a:avLst/>
-          </a:prstGeom>
-          <a:noFill/>
-          <a:ln/>
-        </p:spPr>
-        <p:txBody>
-          <a:bodyPr wrap="square" rtlCol="0" anchor="ctr"/>
-          <a:lstStyle/>
-          <a:p>
-            <a:pPr algn="l" indent="0" marL="0">
-              <a:buNone/>
-            </a:pPr>
-            <a:r>
-              <a:rPr lang="en-US" sz="1000" dirty="0">
-                <a:solidFill>
-                  <a:srgbClr val="666666"/>
-                </a:solidFill>
-                <a:latin typeface="Microsoft YaHei" pitchFamily="34" charset="0"/>
-                <a:ea typeface="Microsoft YaHei" pitchFamily="34" charset="-122"/>
-                <a:cs typeface="Microsoft YaHei" pitchFamily="34" charset="-120"/>
-              </a:rPr>
-              <a:t>不说"激励/策略确实有问题"</a:t>
-            </a:r>
-            <a:endParaRPr lang="en-US" sz="1000" dirty="0"/>
-          </a:p>
-        </p:txBody>
-      </p:sp>
-      <p:sp>
-        <p:nvSpPr>
-          <p:cNvPr id="18" name="Text 16"/>
-          <p:cNvSpPr/>
-          <p:nvPr/>
-        </p:nvSpPr>
-        <p:spPr>
-          <a:xfrm>
-            <a:off x="4663440" y="3108960"/>
-            <a:ext cx="4023360" cy="228600"/>
-          </a:xfrm>
-          <a:prstGeom prst="rect">
-            <a:avLst/>
-          </a:prstGeom>
-          <a:noFill/>
-          <a:ln/>
-        </p:spPr>
-        <p:txBody>
-          <a:bodyPr wrap="square" rtlCol="0" anchor="ctr"/>
-          <a:lstStyle/>
-          <a:p>
-            <a:pPr algn="l" indent="0" marL="0">
-              <a:buNone/>
-            </a:pPr>
-            <a:r>
-              <a:rPr lang="en-US" sz="1100" b="1" dirty="0">
-                <a:solidFill>
-                  <a:srgbClr val="D70015"/>
-                </a:solidFill>
-                <a:latin typeface="Microsoft YaHei" pitchFamily="34" charset="0"/>
-                <a:ea typeface="Microsoft YaHei" pitchFamily="34" charset="-122"/>
-                <a:cs typeface="Microsoft YaHei" pitchFamily="34" charset="-120"/>
-              </a:rPr>
-              <a:t>→ 回归事实</a:t>
-            </a:r>
-            <a:endParaRPr lang="en-US" sz="1100" dirty="0"/>
-          </a:p>
-        </p:txBody>
-      </p:sp>
-      <p:sp>
-        <p:nvSpPr>
-          <p:cNvPr id="19" name="Text 17"/>
-          <p:cNvSpPr/>
-          <p:nvPr/>
-        </p:nvSpPr>
-        <p:spPr>
-          <a:xfrm>
-            <a:off x="4663440" y="3319272"/>
-            <a:ext cx="4023360" cy="411480"/>
-          </a:xfrm>
-          <a:prstGeom prst="rect">
-            <a:avLst/>
-          </a:prstGeom>
-          <a:noFill/>
-          <a:ln/>
-        </p:spPr>
-        <p:txBody>
-          <a:bodyPr wrap="square" rtlCol="0" anchor="ctr"/>
-          <a:lstStyle/>
-          <a:p>
-            <a:pPr algn="l" indent="0" marL="0">
-              <a:buNone/>
-            </a:pPr>
-            <a:r>
-              <a:rPr lang="en-US" sz="1000" dirty="0">
-                <a:solidFill>
-                  <a:srgbClr val="666666"/>
-                </a:solidFill>
-                <a:latin typeface="Microsoft YaHei" pitchFamily="34" charset="0"/>
-                <a:ea typeface="Microsoft YaHei" pitchFamily="34" charset="-122"/>
-                <a:cs typeface="Microsoft YaHei" pitchFamily="34" charset="-120"/>
-              </a:rPr>
-              <a:t>指出"交接期信息真空、数据中断"</a:t>
-            </a:r>
-            <a:endParaRPr lang="en-US" sz="1000" dirty="0"/>
-          </a:p>
-        </p:txBody>
-      </p:sp>
-      <p:sp>
-        <p:nvSpPr>
-          <p:cNvPr id="20" name="Text 18"/>
-          <p:cNvSpPr/>
-          <p:nvPr/>
-        </p:nvSpPr>
-        <p:spPr>
-          <a:xfrm>
-            <a:off x="4663440" y="3794760"/>
-            <a:ext cx="4023360" cy="228600"/>
-          </a:xfrm>
-          <a:prstGeom prst="rect">
-            <a:avLst/>
-          </a:prstGeom>
-          <a:noFill/>
-          <a:ln/>
-        </p:spPr>
-        <p:txBody>
-          <a:bodyPr wrap="square" rtlCol="0" anchor="ctr"/>
-          <a:lstStyle/>
-          <a:p>
-            <a:pPr algn="l" indent="0" marL="0">
-              <a:buNone/>
-            </a:pPr>
-            <a:r>
-              <a:rPr lang="en-US" sz="1100" b="1" dirty="0">
-                <a:solidFill>
-                  <a:srgbClr val="D70015"/>
-                </a:solidFill>
-                <a:latin typeface="Microsoft YaHei" pitchFamily="34" charset="0"/>
-                <a:ea typeface="Microsoft YaHei" pitchFamily="34" charset="-122"/>
-                <a:cs typeface="Microsoft YaHei" pitchFamily="34" charset="-120"/>
-              </a:rPr>
-              <a:t>→ 保护安全感</a:t>
-            </a:r>
-            <a:endParaRPr lang="en-US" sz="1100" dirty="0"/>
-          </a:p>
-        </p:txBody>
-      </p:sp>
-      <p:sp>
-        <p:nvSpPr>
-          <p:cNvPr id="21" name="Text 19"/>
-          <p:cNvSpPr/>
-          <p:nvPr/>
-        </p:nvSpPr>
-        <p:spPr>
-          <a:xfrm>
-            <a:off x="4663440" y="4005072"/>
-            <a:ext cx="4023360" cy="411480"/>
-          </a:xfrm>
-          <a:prstGeom prst="rect">
-            <a:avLst/>
-          </a:prstGeom>
-          <a:noFill/>
-          <a:ln/>
-        </p:spPr>
-        <p:txBody>
-          <a:bodyPr wrap="square" rtlCol="0" anchor="ctr"/>
-          <a:lstStyle/>
-          <a:p>
-            <a:pPr algn="l" indent="0" marL="0">
-              <a:buNone/>
-            </a:pPr>
-            <a:r>
-              <a:rPr lang="en-US" sz="1000" dirty="0">
-                <a:solidFill>
-                  <a:srgbClr val="666666"/>
-                </a:solidFill>
-                <a:latin typeface="Microsoft YaHei" pitchFamily="34" charset="0"/>
-                <a:ea typeface="Microsoft YaHei" pitchFamily="34" charset="-122"/>
-                <a:cs typeface="Microsoft YaHei" pitchFamily="34" charset="-120"/>
-              </a:rPr>
               <a:t>不在群里制造对立，建议私下沟通</a:t>
             </a:r>
-            <a:endParaRPr lang="en-US" sz="1000" dirty="0"/>
+            <a:endParaRPr lang="en-US" sz="900" dirty="0"/>
           </a:p>
         </p:txBody>
       </p:sp>
@@ -7573,8 +7573,8 @@
         </p:nvSpPr>
         <p:spPr>
           <a:xfrm>
-            <a:off x="457200" y="4160520"/>
-            <a:ext cx="8229600" cy="640080"/>
+            <a:off x="457200" y="4023360"/>
+            <a:ext cx="8229600" cy="594360"/>
           </a:xfrm>
           <a:prstGeom prst="rect">
             <a:avLst/>
@@ -7593,24 +7593,24 @@
         </p:nvSpPr>
         <p:spPr>
           <a:xfrm>
-            <a:off x="594360" y="4160520"/>
-            <a:ext cx="7955280" cy="411480"/>
-          </a:xfrm>
-          <a:prstGeom prst="rect">
-            <a:avLst/>
-          </a:prstGeom>
-          <a:noFill/>
-          <a:ln/>
-        </p:spPr>
-        <p:txBody>
-          <a:bodyPr wrap="square" rtlCol="0" anchor="ctr"/>
-          <a:lstStyle/>
-          <a:p>
-            <a:pPr algn="l" indent="0" marL="0">
-              <a:buNone/>
-            </a:pPr>
-            <a:r>
-              <a:rPr lang="en-US" sz="1200" dirty="0">
+            <a:off x="594360" y="4023360"/>
+            <a:ext cx="7955280" cy="365760"/>
+          </a:xfrm>
+          <a:prstGeom prst="rect">
+            <a:avLst/>
+          </a:prstGeom>
+          <a:noFill/>
+          <a:ln/>
+        </p:spPr>
+        <p:txBody>
+          <a:bodyPr wrap="square" rtlCol="0" anchor="ctr"/>
+          <a:lstStyle/>
+          <a:p>
+            <a:pPr algn="l" indent="0" marL="0">
+              <a:buNone/>
+            </a:pPr>
+            <a:r>
+              <a:rPr lang="en-US" sz="1100" dirty="0">
                 <a:solidFill>
                   <a:srgbClr val="FFFFFF"/>
                 </a:solidFill>
@@ -7620,7 +7620,7 @@
               </a:rPr>
               <a:t>"情绪化的数字不能帮助我们解决问题，反而会制造恐慌，破坏团队安全感。"</a:t>
             </a:r>
-            <a:endParaRPr lang="en-US" sz="1200" dirty="0"/>
+            <a:endParaRPr lang="en-US" sz="1100" dirty="0"/>
           </a:p>
         </p:txBody>
       </p:sp>
@@ -7632,8 +7632,8 @@
         </p:nvSpPr>
         <p:spPr>
           <a:xfrm>
-            <a:off x="594360" y="4617720"/>
-            <a:ext cx="7955280" cy="182880"/>
+            <a:off x="594360" y="4434840"/>
+            <a:ext cx="7955280" cy="164592"/>
           </a:xfrm>
           <a:prstGeom prst="rect">
             <a:avLst/>
